--- a/17_stargift/STARGIFT_Ronaldo_butsy.pptx
+++ b/17_stargift/STARGIFT_Ronaldo_butsy.pptx
@@ -4479,8 +4479,8 @@
         </p:blipFill>
         <p:spPr>
           <a:xfrm>
-            <a:off x="3578572" y="1973014"/>
-            <a:ext cx="2911971" cy="2911971"/>
+            <a:off x="3578581" y="1479500"/>
+            <a:ext cx="2911954" cy="3898850"/>
           </a:xfrm>
           <a:prstGeom prst="rect">
             <a:avLst/>

--- a/17_stargift/STARGIFT_Ronaldo_butsy.pptx
+++ b/17_stargift/STARGIFT_Ronaldo_butsy.pptx
@@ -3495,47 +3495,23 @@
         </p:blipFill>
         <p:spPr>
           <a:xfrm>
-            <a:off x="495345" y="1479649"/>
-            <a:ext cx="2911732" cy="3898553"/>
+            <a:off x="486966" y="0"/>
+            <a:ext cx="5122069" cy="6858000"/>
           </a:xfrm>
           <a:prstGeom prst="rect">
             <a:avLst/>
           </a:prstGeom>
         </p:spPr>
       </p:pic>
-      <p:pic>
-        <p:nvPicPr>
-          <p:cNvPr id="4" name="Picture 3" descr="m004.jpg"/>
-          <p:cNvPicPr>
-            <a:picLocks noChangeAspect="1"/>
-          </p:cNvPicPr>
-          <p:nvPr/>
-        </p:nvPicPr>
-        <p:blipFill>
-          <a:blip r:embed="rId3"/>
-          <a:stretch>
-            <a:fillRect/>
-          </a:stretch>
-        </p:blipFill>
-        <p:spPr>
-          <a:xfrm>
-            <a:off x="3578581" y="1479500"/>
-            <a:ext cx="2911954" cy="3898850"/>
-          </a:xfrm>
-          <a:prstGeom prst="rect">
-            <a:avLst/>
-          </a:prstGeom>
-        </p:spPr>
-      </p:pic>
-      <p:sp>
-        <p:nvSpPr>
-          <p:cNvPr id="5" name="TextBox 4"/>
+      <p:sp>
+        <p:nvSpPr>
+          <p:cNvPr id="4" name="TextBox 3"/>
           <p:cNvSpPr txBox="1"/>
           <p:nvPr/>
         </p:nvSpPr>
         <p:spPr>
           <a:xfrm>
-            <a:off x="6871543" y="1770757"/>
+            <a:off x="6267450" y="1891754"/>
             <a:ext cx="1530697" cy="209550"/>
           </a:xfrm>
           <a:prstGeom prst="rect">
@@ -3571,14 +3547,14 @@
       </p:sp>
       <p:sp>
         <p:nvSpPr>
-          <p:cNvPr id="6" name="TextBox 5"/>
+          <p:cNvPr id="5" name="TextBox 4"/>
           <p:cNvSpPr txBox="1"/>
           <p:nvPr/>
         </p:nvSpPr>
         <p:spPr>
           <a:xfrm>
-            <a:off x="6890593" y="2027932"/>
-            <a:ext cx="4806107" cy="1020514"/>
+            <a:off x="6286500" y="2148929"/>
+            <a:ext cx="5410200" cy="1020514"/>
           </a:xfrm>
           <a:prstGeom prst="rect">
             <a:avLst/>
@@ -3613,14 +3589,14 @@
       </p:sp>
       <p:sp>
         <p:nvSpPr>
-          <p:cNvPr id="7" name="TextBox 6"/>
+          <p:cNvPr id="6" name="TextBox 5"/>
           <p:cNvSpPr txBox="1"/>
           <p:nvPr/>
         </p:nvSpPr>
         <p:spPr>
           <a:xfrm>
-            <a:off x="6890593" y="3105596"/>
-            <a:ext cx="4806107" cy="1286173"/>
+            <a:off x="6286500" y="3226594"/>
+            <a:ext cx="5410200" cy="1044178"/>
           </a:xfrm>
           <a:prstGeom prst="rect">
             <a:avLst/>
@@ -3655,13 +3631,13 @@
       </p:sp>
       <p:sp>
         <p:nvSpPr>
-          <p:cNvPr id="8" name="TextBox 7"/>
+          <p:cNvPr id="7" name="TextBox 6"/>
           <p:cNvSpPr txBox="1"/>
           <p:nvPr/>
         </p:nvSpPr>
         <p:spPr>
           <a:xfrm>
-            <a:off x="6871543" y="4487019"/>
+            <a:off x="6267450" y="4366022"/>
             <a:ext cx="1289596" cy="428625"/>
           </a:xfrm>
           <a:prstGeom prst="rect">
@@ -3697,13 +3673,13 @@
       </p:sp>
       <p:sp>
         <p:nvSpPr>
-          <p:cNvPr id="9" name="TextBox 8"/>
+          <p:cNvPr id="8" name="TextBox 7"/>
           <p:cNvSpPr txBox="1"/>
           <p:nvPr/>
         </p:nvSpPr>
         <p:spPr>
           <a:xfrm>
-            <a:off x="6871543" y="4925169"/>
+            <a:off x="6267450" y="4804172"/>
             <a:ext cx="1603177" cy="190500"/>
           </a:xfrm>
           <a:prstGeom prst="rect">
@@ -3801,7 +3777,7 @@
       </p:sp>
       <p:pic>
         <p:nvPicPr>
-          <p:cNvPr id="3" name="Picture 2" descr="m005.jpg"/>
+          <p:cNvPr id="3" name="Picture 2" descr="m004.jpg"/>
           <p:cNvPicPr>
             <a:picLocks noChangeAspect="1"/>
           </p:cNvPicPr>
@@ -3815,47 +3791,23 @@
         </p:blipFill>
         <p:spPr>
           <a:xfrm>
-            <a:off x="495345" y="1479649"/>
-            <a:ext cx="2911732" cy="3898553"/>
+            <a:off x="486966" y="0"/>
+            <a:ext cx="5122069" cy="6858000"/>
           </a:xfrm>
           <a:prstGeom prst="rect">
             <a:avLst/>
           </a:prstGeom>
         </p:spPr>
       </p:pic>
-      <p:pic>
-        <p:nvPicPr>
-          <p:cNvPr id="4" name="Picture 3" descr="m006.jpg"/>
-          <p:cNvPicPr>
-            <a:picLocks noChangeAspect="1"/>
-          </p:cNvPicPr>
-          <p:nvPr/>
-        </p:nvPicPr>
-        <p:blipFill>
-          <a:blip r:embed="rId3"/>
-          <a:stretch>
-            <a:fillRect/>
-          </a:stretch>
-        </p:blipFill>
-        <p:spPr>
-          <a:xfrm>
-            <a:off x="3578581" y="1479500"/>
-            <a:ext cx="2911954" cy="3898850"/>
-          </a:xfrm>
-          <a:prstGeom prst="rect">
-            <a:avLst/>
-          </a:prstGeom>
-        </p:spPr>
-      </p:pic>
-      <p:sp>
-        <p:nvSpPr>
-          <p:cNvPr id="5" name="TextBox 4"/>
+      <p:sp>
+        <p:nvSpPr>
+          <p:cNvPr id="4" name="TextBox 3"/>
           <p:cNvSpPr txBox="1"/>
           <p:nvPr/>
         </p:nvSpPr>
         <p:spPr>
           <a:xfrm>
-            <a:off x="6871543" y="1928217"/>
+            <a:off x="6267450" y="2049214"/>
             <a:ext cx="1551831" cy="209550"/>
           </a:xfrm>
           <a:prstGeom prst="rect">
@@ -3891,14 +3843,14 @@
       </p:sp>
       <p:sp>
         <p:nvSpPr>
-          <p:cNvPr id="6" name="TextBox 5"/>
+          <p:cNvPr id="5" name="TextBox 4"/>
           <p:cNvSpPr txBox="1"/>
           <p:nvPr/>
         </p:nvSpPr>
         <p:spPr>
           <a:xfrm>
-            <a:off x="6890593" y="2185392"/>
-            <a:ext cx="4806107" cy="705743"/>
+            <a:off x="6286500" y="2306389"/>
+            <a:ext cx="5410200" cy="705743"/>
           </a:xfrm>
           <a:prstGeom prst="rect">
             <a:avLst/>
@@ -3933,14 +3885,14 @@
       </p:sp>
       <p:sp>
         <p:nvSpPr>
-          <p:cNvPr id="7" name="TextBox 6"/>
+          <p:cNvPr id="6" name="TextBox 5"/>
           <p:cNvSpPr txBox="1"/>
           <p:nvPr/>
         </p:nvSpPr>
         <p:spPr>
           <a:xfrm>
-            <a:off x="6890593" y="2948285"/>
-            <a:ext cx="4806107" cy="1286173"/>
+            <a:off x="6286500" y="3069282"/>
+            <a:ext cx="5410200" cy="1044178"/>
           </a:xfrm>
           <a:prstGeom prst="rect">
             <a:avLst/>
@@ -3975,13 +3927,13 @@
       </p:sp>
       <p:sp>
         <p:nvSpPr>
-          <p:cNvPr id="8" name="TextBox 7"/>
+          <p:cNvPr id="7" name="TextBox 6"/>
           <p:cNvSpPr txBox="1"/>
           <p:nvPr/>
         </p:nvSpPr>
         <p:spPr>
           <a:xfrm>
-            <a:off x="6871543" y="4329708"/>
+            <a:off x="6267450" y="4208711"/>
             <a:ext cx="1271588" cy="428625"/>
           </a:xfrm>
           <a:prstGeom prst="rect">
@@ -4017,13 +3969,13 @@
       </p:sp>
       <p:sp>
         <p:nvSpPr>
-          <p:cNvPr id="9" name="TextBox 8"/>
+          <p:cNvPr id="8" name="TextBox 7"/>
           <p:cNvSpPr txBox="1"/>
           <p:nvPr/>
         </p:nvSpPr>
         <p:spPr>
           <a:xfrm>
-            <a:off x="6871543" y="4767858"/>
+            <a:off x="6267450" y="4646861"/>
             <a:ext cx="808732" cy="190500"/>
           </a:xfrm>
           <a:prstGeom prst="rect">
@@ -4121,7 +4073,7 @@
       </p:sp>
       <p:pic>
         <p:nvPicPr>
-          <p:cNvPr id="3" name="Picture 2" descr="m007.jpg"/>
+          <p:cNvPr id="3" name="Picture 2" descr="m005.jpg"/>
           <p:cNvPicPr>
             <a:picLocks noChangeAspect="1"/>
           </p:cNvPicPr>
@@ -4135,47 +4087,23 @@
         </p:blipFill>
         <p:spPr>
           <a:xfrm>
-            <a:off x="495345" y="1479649"/>
-            <a:ext cx="2911732" cy="3898553"/>
+            <a:off x="486966" y="0"/>
+            <a:ext cx="5122069" cy="6858000"/>
           </a:xfrm>
           <a:prstGeom prst="rect">
             <a:avLst/>
           </a:prstGeom>
         </p:spPr>
       </p:pic>
-      <p:pic>
-        <p:nvPicPr>
-          <p:cNvPr id="4" name="Picture 3" descr="m008.jpg"/>
-          <p:cNvPicPr>
-            <a:picLocks noChangeAspect="1"/>
-          </p:cNvPicPr>
-          <p:nvPr/>
-        </p:nvPicPr>
-        <p:blipFill>
-          <a:blip r:embed="rId3"/>
-          <a:stretch>
-            <a:fillRect/>
-          </a:stretch>
-        </p:blipFill>
-        <p:spPr>
-          <a:xfrm>
-            <a:off x="3578581" y="1479500"/>
-            <a:ext cx="2911954" cy="3898850"/>
-          </a:xfrm>
-          <a:prstGeom prst="rect">
-            <a:avLst/>
-          </a:prstGeom>
-        </p:spPr>
-      </p:pic>
-      <p:sp>
-        <p:nvSpPr>
-          <p:cNvPr id="5" name="TextBox 4"/>
+      <p:sp>
+        <p:nvSpPr>
+          <p:cNvPr id="4" name="TextBox 3"/>
           <p:cNvSpPr txBox="1"/>
           <p:nvPr/>
         </p:nvSpPr>
         <p:spPr>
           <a:xfrm>
-            <a:off x="6871543" y="1928217"/>
+            <a:off x="6267450" y="1928217"/>
             <a:ext cx="1553021" cy="209550"/>
           </a:xfrm>
           <a:prstGeom prst="rect">
@@ -4211,14 +4139,14 @@
       </p:sp>
       <p:sp>
         <p:nvSpPr>
-          <p:cNvPr id="6" name="TextBox 5"/>
+          <p:cNvPr id="5" name="TextBox 4"/>
           <p:cNvSpPr txBox="1"/>
           <p:nvPr/>
         </p:nvSpPr>
         <p:spPr>
           <a:xfrm>
-            <a:off x="6890593" y="2185392"/>
-            <a:ext cx="4806107" cy="705743"/>
+            <a:off x="6286500" y="2185392"/>
+            <a:ext cx="5410200" cy="705743"/>
           </a:xfrm>
           <a:prstGeom prst="rect">
             <a:avLst/>
@@ -4253,14 +4181,14 @@
       </p:sp>
       <p:sp>
         <p:nvSpPr>
-          <p:cNvPr id="7" name="TextBox 6"/>
+          <p:cNvPr id="6" name="TextBox 5"/>
           <p:cNvSpPr txBox="1"/>
           <p:nvPr/>
         </p:nvSpPr>
         <p:spPr>
           <a:xfrm>
-            <a:off x="6890593" y="2948285"/>
-            <a:ext cx="4806107" cy="1286173"/>
+            <a:off x="6286500" y="2948285"/>
+            <a:ext cx="5410200" cy="1286173"/>
           </a:xfrm>
           <a:prstGeom prst="rect">
             <a:avLst/>
@@ -4295,13 +4223,13 @@
       </p:sp>
       <p:sp>
         <p:nvSpPr>
-          <p:cNvPr id="8" name="TextBox 7"/>
+          <p:cNvPr id="7" name="TextBox 6"/>
           <p:cNvSpPr txBox="1"/>
           <p:nvPr/>
         </p:nvSpPr>
         <p:spPr>
           <a:xfrm>
-            <a:off x="6871543" y="4329708"/>
+            <a:off x="6267450" y="4329708"/>
             <a:ext cx="1271588" cy="428625"/>
           </a:xfrm>
           <a:prstGeom prst="rect">
@@ -4337,13 +4265,13 @@
       </p:sp>
       <p:sp>
         <p:nvSpPr>
-          <p:cNvPr id="9" name="TextBox 8"/>
+          <p:cNvPr id="8" name="TextBox 7"/>
           <p:cNvSpPr txBox="1"/>
           <p:nvPr/>
         </p:nvSpPr>
         <p:spPr>
           <a:xfrm>
-            <a:off x="6871543" y="4767858"/>
+            <a:off x="6267450" y="4767858"/>
             <a:ext cx="1603177" cy="190500"/>
           </a:xfrm>
           <a:prstGeom prst="rect">
@@ -4441,7 +4369,7 @@
       </p:sp>
       <p:pic>
         <p:nvPicPr>
-          <p:cNvPr id="3" name="Picture 2" descr="m009.jpg"/>
+          <p:cNvPr id="3" name="Picture 2" descr="m006.jpg"/>
           <p:cNvPicPr>
             <a:picLocks noChangeAspect="1"/>
           </p:cNvPicPr>
@@ -4455,47 +4383,23 @@
         </p:blipFill>
         <p:spPr>
           <a:xfrm>
-            <a:off x="495345" y="1479649"/>
-            <a:ext cx="2911732" cy="3898553"/>
+            <a:off x="486966" y="0"/>
+            <a:ext cx="5122069" cy="6858000"/>
           </a:xfrm>
           <a:prstGeom prst="rect">
             <a:avLst/>
           </a:prstGeom>
         </p:spPr>
       </p:pic>
-      <p:pic>
-        <p:nvPicPr>
-          <p:cNvPr id="4" name="Picture 3" descr="m010.jpg"/>
-          <p:cNvPicPr>
-            <a:picLocks noChangeAspect="1"/>
-          </p:cNvPicPr>
-          <p:nvPr/>
-        </p:nvPicPr>
-        <p:blipFill>
-          <a:blip r:embed="rId3"/>
-          <a:stretch>
-            <a:fillRect/>
-          </a:stretch>
-        </p:blipFill>
-        <p:spPr>
-          <a:xfrm>
-            <a:off x="3578581" y="1479500"/>
-            <a:ext cx="2911954" cy="3898850"/>
-          </a:xfrm>
-          <a:prstGeom prst="rect">
-            <a:avLst/>
-          </a:prstGeom>
-        </p:spPr>
-      </p:pic>
-      <p:sp>
-        <p:nvSpPr>
-          <p:cNvPr id="5" name="TextBox 4"/>
+      <p:sp>
+        <p:nvSpPr>
+          <p:cNvPr id="4" name="TextBox 3"/>
           <p:cNvSpPr txBox="1"/>
           <p:nvPr/>
         </p:nvSpPr>
         <p:spPr>
           <a:xfrm>
-            <a:off x="6871543" y="2023467"/>
+            <a:off x="6267450" y="2144464"/>
             <a:ext cx="1555998" cy="209550"/>
           </a:xfrm>
           <a:prstGeom prst="rect">
@@ -4531,14 +4435,14 @@
       </p:sp>
       <p:sp>
         <p:nvSpPr>
-          <p:cNvPr id="6" name="TextBox 5"/>
+          <p:cNvPr id="5" name="TextBox 4"/>
           <p:cNvSpPr txBox="1"/>
           <p:nvPr/>
         </p:nvSpPr>
         <p:spPr>
           <a:xfrm>
-            <a:off x="6890593" y="2280642"/>
-            <a:ext cx="4806107" cy="705743"/>
+            <a:off x="6286500" y="2401639"/>
+            <a:ext cx="5410200" cy="705743"/>
           </a:xfrm>
           <a:prstGeom prst="rect">
             <a:avLst/>
@@ -4573,14 +4477,14 @@
       </p:sp>
       <p:sp>
         <p:nvSpPr>
-          <p:cNvPr id="7" name="TextBox 6"/>
+          <p:cNvPr id="6" name="TextBox 5"/>
           <p:cNvSpPr txBox="1"/>
           <p:nvPr/>
         </p:nvSpPr>
         <p:spPr>
           <a:xfrm>
-            <a:off x="6890593" y="3043535"/>
-            <a:ext cx="4806107" cy="1286173"/>
+            <a:off x="6286500" y="3164532"/>
+            <a:ext cx="5410200" cy="1044178"/>
           </a:xfrm>
           <a:prstGeom prst="rect">
             <a:avLst/>
@@ -4615,13 +4519,13 @@
       </p:sp>
       <p:sp>
         <p:nvSpPr>
-          <p:cNvPr id="8" name="TextBox 7"/>
+          <p:cNvPr id="7" name="TextBox 6"/>
           <p:cNvSpPr txBox="1"/>
           <p:nvPr/>
         </p:nvSpPr>
         <p:spPr>
           <a:xfrm>
-            <a:off x="6871543" y="4424958"/>
+            <a:off x="6267450" y="4303961"/>
             <a:ext cx="1271588" cy="428625"/>
           </a:xfrm>
           <a:prstGeom prst="rect">
@@ -4763,7 +4667,7 @@
       </p:sp>
       <p:pic>
         <p:nvPicPr>
-          <p:cNvPr id="4" name="Picture 3" descr="m011.png"/>
+          <p:cNvPr id="4" name="Picture 3" descr="m007.png"/>
           <p:cNvPicPr>
             <a:picLocks noChangeAspect="1"/>
           </p:cNvPicPr>
@@ -5017,7 +4921,7 @@
       </p:sp>
       <p:pic>
         <p:nvPicPr>
-          <p:cNvPr id="3" name="Picture 2" descr="m012.jpg"/>
+          <p:cNvPr id="3" name="Picture 2" descr="m008.jpg"/>
           <p:cNvPicPr>
             <a:picLocks noChangeAspect="1"/>
           </p:cNvPicPr>
@@ -5041,7 +4945,7 @@
       </p:pic>
       <p:pic>
         <p:nvPicPr>
-          <p:cNvPr id="4" name="Picture 3" descr="m013.jpg"/>
+          <p:cNvPr id="4" name="Picture 3" descr="m009.jpg"/>
           <p:cNvPicPr>
             <a:picLocks noChangeAspect="1"/>
           </p:cNvPicPr>
@@ -5955,7 +5859,7 @@
       </p:sp>
       <p:pic>
         <p:nvPicPr>
-          <p:cNvPr id="4" name="Picture 3" descr="m014.png"/>
+          <p:cNvPr id="4" name="Picture 3" descr="m010.png"/>
           <p:cNvPicPr>
             <a:picLocks noChangeAspect="1"/>
           </p:cNvPicPr>

--- a/17_stargift/STARGIFT_Ronaldo_butsy.pptx
+++ b/17_stargift/STARGIFT_Ronaldo_butsy.pptx
@@ -3489,14 +3489,15 @@
         </p:nvPicPr>
         <p:blipFill>
           <a:blip r:embed="rId2"/>
+          <a:srcRect t="7988" b="7988"/>
           <a:stretch>
             <a:fillRect/>
           </a:stretch>
         </p:blipFill>
         <p:spPr>
           <a:xfrm>
-            <a:off x="486966" y="0"/>
-            <a:ext cx="5122069" cy="6858000"/>
+            <a:off x="0" y="0"/>
+            <a:ext cx="6096000" cy="6858000"/>
           </a:xfrm>
           <a:prstGeom prst="rect">
             <a:avLst/>
@@ -3785,14 +3786,15 @@
         </p:nvPicPr>
         <p:blipFill>
           <a:blip r:embed="rId2"/>
+          <a:srcRect t="7988" b="7988"/>
           <a:stretch>
             <a:fillRect/>
           </a:stretch>
         </p:blipFill>
         <p:spPr>
           <a:xfrm>
-            <a:off x="486966" y="0"/>
-            <a:ext cx="5122069" cy="6858000"/>
+            <a:off x="0" y="0"/>
+            <a:ext cx="6096000" cy="6858000"/>
           </a:xfrm>
           <a:prstGeom prst="rect">
             <a:avLst/>
@@ -4081,14 +4083,15 @@
         </p:nvPicPr>
         <p:blipFill>
           <a:blip r:embed="rId2"/>
+          <a:srcRect t="7988" b="7988"/>
           <a:stretch>
             <a:fillRect/>
           </a:stretch>
         </p:blipFill>
         <p:spPr>
           <a:xfrm>
-            <a:off x="486966" y="0"/>
-            <a:ext cx="5122069" cy="6858000"/>
+            <a:off x="0" y="0"/>
+            <a:ext cx="6096000" cy="6858000"/>
           </a:xfrm>
           <a:prstGeom prst="rect">
             <a:avLst/>
@@ -4377,14 +4380,15 @@
         </p:nvPicPr>
         <p:blipFill>
           <a:blip r:embed="rId2"/>
+          <a:srcRect t="7988" b="7988"/>
           <a:stretch>
             <a:fillRect/>
           </a:stretch>
         </p:blipFill>
         <p:spPr>
           <a:xfrm>
-            <a:off x="486966" y="0"/>
-            <a:ext cx="5122069" cy="6858000"/>
+            <a:off x="0" y="0"/>
+            <a:ext cx="6096000" cy="6858000"/>
           </a:xfrm>
           <a:prstGeom prst="rect">
             <a:avLst/>

--- a/17_stargift/STARGIFT_Ronaldo_butsy.pptx
+++ b/17_stargift/STARGIFT_Ronaldo_butsy.pptx
@@ -14,6 +14,7 @@
     <p:sldId id="262" r:id="rId13"/>
     <p:sldId id="263" r:id="rId14"/>
     <p:sldId id="264" r:id="rId15"/>
+    <p:sldId id="265" r:id="rId16"/>
   </p:sldIdLst>
   <p:sldSz cx="12192000" cy="6858000" type="screen4x3"/>
   <p:notesSz cx="6858000" cy="9144000"/>
@@ -3425,7 +3426,7 @@
 </p:sld>
 </file>
 
-<file path=ppt/slides/slide2.xml><?xml version="1.0" encoding="utf-8"?>
+<file path=ppt/slides/slide10.xml><?xml version="1.0" encoding="utf-8"?>
 <p:sld xmlns:a="http://schemas.openxmlformats.org/drawingml/2006/main" xmlns:p="http://schemas.openxmlformats.org/presentationml/2006/main" xmlns:r="http://schemas.openxmlformats.org/officeDocument/2006/relationships">
   <p:cSld>
     <p:spTree>
@@ -3450,7 +3451,7 @@
             <a:avLst/>
           </a:prstGeom>
           <a:solidFill>
-            <a:srgbClr val="FFFFFF"/>
+            <a:srgbClr val="0B0B0C"/>
           </a:solidFill>
           <a:ln>
             <a:noFill/>
@@ -3479,6 +3480,220 @@
           </a:p>
         </p:txBody>
       </p:sp>
+      <p:sp>
+        <p:nvSpPr>
+          <p:cNvPr id="3" name="Rectangle 2"/>
+          <p:cNvSpPr/>
+          <p:nvPr/>
+        </p:nvSpPr>
+        <p:spPr>
+          <a:xfrm>
+            <a:off x="0" y="6115050"/>
+            <a:ext cx="12192000" cy="9525"/>
+          </a:xfrm>
+          <a:prstGeom prst="rect">
+            <a:avLst/>
+          </a:prstGeom>
+          <a:solidFill>
+            <a:srgbClr val="3A301D"/>
+          </a:solidFill>
+          <a:ln>
+            <a:noFill/>
+          </a:ln>
+          <a:effectLst/>
+        </p:spPr>
+        <p:style>
+          <a:lnRef idx="1">
+            <a:schemeClr val="accent1"/>
+          </a:lnRef>
+          <a:fillRef idx="3">
+            <a:schemeClr val="accent1"/>
+          </a:fillRef>
+          <a:effectRef idx="2">
+            <a:schemeClr val="accent1"/>
+          </a:effectRef>
+          <a:fontRef idx="minor">
+            <a:schemeClr val="lt1"/>
+          </a:fontRef>
+        </p:style>
+        <p:txBody>
+          <a:bodyPr rtlCol="0" anchor="ctr"/>
+          <a:lstStyle/>
+          <a:p>
+            <a:pPr algn="ctr"/>
+          </a:p>
+        </p:txBody>
+      </p:sp>
+      <p:pic>
+        <p:nvPicPr>
+          <p:cNvPr id="4" name="Picture 3" descr="m011.png"/>
+          <p:cNvPicPr>
+            <a:picLocks noChangeAspect="1"/>
+          </p:cNvPicPr>
+          <p:nvPr/>
+        </p:nvPicPr>
+        <p:blipFill>
+          <a:blip r:embed="rId2"/>
+          <a:stretch>
+            <a:fillRect/>
+          </a:stretch>
+        </p:blipFill>
+        <p:spPr>
+          <a:xfrm>
+            <a:off x="685800" y="2043721"/>
+            <a:ext cx="1830437" cy="1390624"/>
+          </a:xfrm>
+          <a:prstGeom prst="rect">
+            <a:avLst/>
+          </a:prstGeom>
+        </p:spPr>
+      </p:pic>
+      <p:sp>
+        <p:nvSpPr>
+          <p:cNvPr id="5" name="TextBox 4"/>
+          <p:cNvSpPr txBox="1"/>
+          <p:nvPr/>
+        </p:nvSpPr>
+        <p:spPr>
+          <a:xfrm>
+            <a:off x="666750" y="3777258"/>
+            <a:ext cx="6326981" cy="1075134"/>
+          </a:xfrm>
+          <a:prstGeom prst="rect">
+            <a:avLst/>
+          </a:prstGeom>
+          <a:noFill/>
+        </p:spPr>
+        <p:txBody>
+          <a:bodyPr wrap="square" lIns="0" rIns="0" tIns="0" bIns="0" anchor="t">
+            <a:noAutofit/>
+          </a:bodyPr>
+          <a:lstStyle/>
+          <a:p>
+            <a:pPr algn="l">
+              <a:lnSpc>
+                <a:spcPts val="3933"/>
+              </a:lnSpc>
+            </a:pPr>
+            <a:r>
+              <a:rPr sz="3450" b="0" i="0">
+                <a:solidFill>
+                  <a:srgbClr val="F5F1E8"/>
+                </a:solidFill>
+                <a:latin typeface="Cormorant Garamond"/>
+                <a:latin typeface="Cormorant Garamond"/>
+                <a:ea typeface="Cormorant Garamond"/>
+                <a:cs typeface="Cormorant Garamond"/>
+              </a:rPr>
+              <a:t>Криштиану Роналду. Четыре бутсы — одна карьера.</a:t>
+            </a:r>
+          </a:p>
+        </p:txBody>
+      </p:sp>
+      <p:sp>
+        <p:nvSpPr>
+          <p:cNvPr id="6" name="TextBox 5"/>
+          <p:cNvSpPr txBox="1"/>
+          <p:nvPr/>
+        </p:nvSpPr>
+        <p:spPr>
+          <a:xfrm>
+            <a:off x="647700" y="6334125"/>
+            <a:ext cx="1184672" cy="209550"/>
+          </a:xfrm>
+          <a:prstGeom prst="rect">
+            <a:avLst/>
+          </a:prstGeom>
+          <a:noFill/>
+        </p:spPr>
+        <p:txBody>
+          <a:bodyPr wrap="square" lIns="0" rIns="0" tIns="0" bIns="0" anchor="t">
+            <a:noAutofit/>
+          </a:bodyPr>
+          <a:lstStyle/>
+          <a:p>
+            <a:pPr algn="l">
+              <a:lnSpc>
+                <a:spcPts val="1440"/>
+              </a:lnSpc>
+            </a:pPr>
+            <a:r>
+              <a:rPr sz="819" b="0" i="0" spc="198">
+                <a:solidFill>
+                  <a:srgbClr val="C9A96A"/>
+                </a:solidFill>
+                <a:latin typeface="Inter"/>
+                <a:latin typeface="Inter"/>
+                <a:ea typeface="Inter"/>
+                <a:cs typeface="Inter"/>
+              </a:rPr>
+              <a:t>STARGIFT.RU</a:t>
+            </a:r>
+          </a:p>
+        </p:txBody>
+      </p:sp>
+    </p:spTree>
+  </p:cSld>
+  <p:clrMapOvr>
+    <a:masterClrMapping/>
+  </p:clrMapOvr>
+</p:sld>
+</file>
+
+<file path=ppt/slides/slide2.xml><?xml version="1.0" encoding="utf-8"?>
+<p:sld xmlns:a="http://schemas.openxmlformats.org/drawingml/2006/main" xmlns:p="http://schemas.openxmlformats.org/presentationml/2006/main" xmlns:r="http://schemas.openxmlformats.org/officeDocument/2006/relationships">
+  <p:cSld>
+    <p:spTree>
+      <p:nvGrpSpPr>
+        <p:cNvPr id="1" name=""/>
+        <p:cNvGrpSpPr/>
+        <p:nvPr/>
+      </p:nvGrpSpPr>
+      <p:grpSpPr/>
+      <p:sp>
+        <p:nvSpPr>
+          <p:cNvPr id="2" name="Rectangle 1"/>
+          <p:cNvSpPr/>
+          <p:nvPr/>
+        </p:nvSpPr>
+        <p:spPr>
+          <a:xfrm>
+            <a:off x="0" y="0"/>
+            <a:ext cx="12192000" cy="6858000"/>
+          </a:xfrm>
+          <a:prstGeom prst="rect">
+            <a:avLst/>
+          </a:prstGeom>
+          <a:solidFill>
+            <a:srgbClr val="FFFFFF"/>
+          </a:solidFill>
+          <a:ln>
+            <a:noFill/>
+          </a:ln>
+          <a:effectLst/>
+        </p:spPr>
+        <p:style>
+          <a:lnRef idx="1">
+            <a:schemeClr val="accent1"/>
+          </a:lnRef>
+          <a:fillRef idx="3">
+            <a:schemeClr val="accent1"/>
+          </a:fillRef>
+          <a:effectRef idx="2">
+            <a:schemeClr val="accent1"/>
+          </a:effectRef>
+          <a:fontRef idx="minor">
+            <a:schemeClr val="lt1"/>
+          </a:fontRef>
+        </p:style>
+        <p:txBody>
+          <a:bodyPr rtlCol="0" anchor="ctr"/>
+          <a:lstStyle/>
+          <a:p>
+            <a:pPr algn="ctr"/>
+          </a:p>
+        </p:txBody>
+      </p:sp>
       <p:pic>
         <p:nvPicPr>
           <p:cNvPr id="3" name="Picture 2" descr="m003.jpg"/>
@@ -3489,7 +3704,7 @@
         </p:nvPicPr>
         <p:blipFill>
           <a:blip r:embed="rId2"/>
-          <a:srcRect t="7988" b="7988"/>
+          <a:srcRect/>
           <a:stretch>
             <a:fillRect/>
           </a:stretch>
@@ -3512,7 +3727,7 @@
         </p:nvSpPr>
         <p:spPr>
           <a:xfrm>
-            <a:off x="6267450" y="1891754"/>
+            <a:off x="6267450" y="1770757"/>
             <a:ext cx="1530697" cy="209550"/>
           </a:xfrm>
           <a:prstGeom prst="rect">
@@ -3554,7 +3769,7 @@
         </p:nvSpPr>
         <p:spPr>
           <a:xfrm>
-            <a:off x="6286500" y="2148929"/>
+            <a:off x="6286500" y="2027932"/>
             <a:ext cx="5410200" cy="1020514"/>
           </a:xfrm>
           <a:prstGeom prst="rect">
@@ -3596,8 +3811,8 @@
         </p:nvSpPr>
         <p:spPr>
           <a:xfrm>
-            <a:off x="6286500" y="3226594"/>
-            <a:ext cx="5410200" cy="1044178"/>
+            <a:off x="6286500" y="3105596"/>
+            <a:ext cx="5410200" cy="1286173"/>
           </a:xfrm>
           <a:prstGeom prst="rect">
             <a:avLst/>
@@ -3625,7 +3840,7 @@
                 <a:ea typeface="Inter"/>
                 <a:cs typeface="Inter"/>
               </a:rPr>
-              <a:t>Красная бутса Nike Mercurial линейки CR7 — с автографом, поставленным в присутствии представителя Beckett. Witnessed — высший уровень экспертизы: свидетель фиксирует сам момент подписи. Контрастный чёрный росчерк на алом верхе читается через всю бутсу.</a:t>
+              <a:t>Красная бутса Nike Mercurial линейки CR7 — с автографом, поставленным в присутствии представителя Beckett. Witnessed — высший уровень экспертизы: свидетель фиксирует сам момент подписи. Контрастный чёрный росчерк на алом верхе читается через всю бутсу. Оформлена в акриловый бокс на основании из чёрного мрамора.</a:t>
             </a:r>
           </a:p>
         </p:txBody>
@@ -3638,7 +3853,7 @@
         </p:nvSpPr>
         <p:spPr>
           <a:xfrm>
-            <a:off x="6267450" y="4366022"/>
+            <a:off x="6267450" y="4487019"/>
             <a:ext cx="1289596" cy="428625"/>
           </a:xfrm>
           <a:prstGeom prst="rect">
@@ -3680,7 +3895,7 @@
         </p:nvSpPr>
         <p:spPr>
           <a:xfrm>
-            <a:off x="6267450" y="4804172"/>
+            <a:off x="6267450" y="4925169"/>
             <a:ext cx="1603177" cy="190500"/>
           </a:xfrm>
           <a:prstGeom prst="rect">
@@ -3786,7 +4001,7 @@
         </p:nvPicPr>
         <p:blipFill>
           <a:blip r:embed="rId2"/>
-          <a:srcRect t="7988" b="7988"/>
+          <a:srcRect/>
           <a:stretch>
             <a:fillRect/>
           </a:stretch>
@@ -3809,7 +4024,7 @@
         </p:nvSpPr>
         <p:spPr>
           <a:xfrm>
-            <a:off x="6267450" y="2049214"/>
+            <a:off x="6267450" y="1807220"/>
             <a:ext cx="1551831" cy="209550"/>
           </a:xfrm>
           <a:prstGeom prst="rect">
@@ -3851,7 +4066,7 @@
         </p:nvSpPr>
         <p:spPr>
           <a:xfrm>
-            <a:off x="6286500" y="2306389"/>
+            <a:off x="6286500" y="2064395"/>
             <a:ext cx="5410200" cy="705743"/>
           </a:xfrm>
           <a:prstGeom prst="rect">
@@ -3893,8 +4108,8 @@
         </p:nvSpPr>
         <p:spPr>
           <a:xfrm>
-            <a:off x="6286500" y="3069282"/>
-            <a:ext cx="5410200" cy="1044178"/>
+            <a:off x="6286500" y="2827288"/>
+            <a:ext cx="5410200" cy="1528167"/>
           </a:xfrm>
           <a:prstGeom prst="rect">
             <a:avLst/>
@@ -3922,7 +4137,7 @@
                 <a:ea typeface="Inter"/>
                 <a:cs typeface="Inter"/>
               </a:rPr>
-              <a:t>Бутса Nike Mercurial серии Dream Speed — личной линейки Роналду внутри Nike — с автографом синим маркером. Бело-голубая расцветка с фирменной стелькой CR7. Mercurial — силуэт, в котором Роналду провёл всю карьеру: от «Манчестер Юнайтед» до сборной Португалии.</a:t>
+              <a:t>Бутса Nike Mercurial серии Dream Speed — личной линейки Роналду внутри Nike — с автографом синим маркером. Бело-голубая расцветка с фирменной стелькой CR7. Mercurial — силуэт, в котором Роналду провёл всю карьеру: от «Манчестер Юнайтед» до сборной Португалии. Оформлена в акриловый бокс на основании из белого каррарского мрамора.</a:t>
             </a:r>
           </a:p>
         </p:txBody>
@@ -3935,7 +4150,7 @@
         </p:nvSpPr>
         <p:spPr>
           <a:xfrm>
-            <a:off x="6267450" y="4208711"/>
+            <a:off x="6267450" y="4450705"/>
             <a:ext cx="1271588" cy="428625"/>
           </a:xfrm>
           <a:prstGeom prst="rect">
@@ -3977,7 +4192,7 @@
         </p:nvSpPr>
         <p:spPr>
           <a:xfrm>
-            <a:off x="6267450" y="4646861"/>
+            <a:off x="6267450" y="4888855"/>
             <a:ext cx="808732" cy="190500"/>
           </a:xfrm>
           <a:prstGeom prst="rect">
@@ -4083,7 +4298,7 @@
         </p:nvPicPr>
         <p:blipFill>
           <a:blip r:embed="rId2"/>
-          <a:srcRect t="7988" b="7988"/>
+          <a:srcRect/>
           <a:stretch>
             <a:fillRect/>
           </a:stretch>
@@ -4106,7 +4321,7 @@
         </p:nvSpPr>
         <p:spPr>
           <a:xfrm>
-            <a:off x="6267450" y="1928217"/>
+            <a:off x="6267450" y="1807220"/>
             <a:ext cx="1553021" cy="209550"/>
           </a:xfrm>
           <a:prstGeom prst="rect">
@@ -4148,7 +4363,7 @@
         </p:nvSpPr>
         <p:spPr>
           <a:xfrm>
-            <a:off x="6286500" y="2185392"/>
+            <a:off x="6286500" y="2064395"/>
             <a:ext cx="5410200" cy="705743"/>
           </a:xfrm>
           <a:prstGeom prst="rect">
@@ -4190,8 +4405,8 @@
         </p:nvSpPr>
         <p:spPr>
           <a:xfrm>
-            <a:off x="6286500" y="2948285"/>
-            <a:ext cx="5410200" cy="1286173"/>
+            <a:off x="6286500" y="2827288"/>
+            <a:ext cx="5410200" cy="1528167"/>
           </a:xfrm>
           <a:prstGeom prst="rect">
             <a:avLst/>
@@ -4219,7 +4434,7 @@
                 <a:ea typeface="Inter"/>
                 <a:cs typeface="Inter"/>
               </a:rPr>
-              <a:t>Белая бутса Nike Mercurial с гранёным паттерном серии CR7 — с автографом, поставленным 6 мая 2018 года в Лиссабоне при представителе Beckett. Экземпляр новый, с пломбой; номер сертификата проверяется онлайн за минуту. Весна 2018-го — последние месяцы Роналду в «Реал Мадриде».</a:t>
+              <a:t>Белая бутса Nike Mercurial с гранёным паттерном серии CR7 — с автографом, поставленным 6 мая 2018 года в Лиссабоне при представителе Beckett. Экземпляр новый, с пломбой; номер сертификата проверяется онлайн за минуту. Весна 2018-го — последние месяцы Роналду в «Реал Мадриде». Оформлена в акриловый бокс на основании из красного дерева.</a:t>
             </a:r>
           </a:p>
         </p:txBody>
@@ -4232,7 +4447,7 @@
         </p:nvSpPr>
         <p:spPr>
           <a:xfrm>
-            <a:off x="6267450" y="4329708"/>
+            <a:off x="6267450" y="4450705"/>
             <a:ext cx="1271588" cy="428625"/>
           </a:xfrm>
           <a:prstGeom prst="rect">
@@ -4274,7 +4489,7 @@
         </p:nvSpPr>
         <p:spPr>
           <a:xfrm>
-            <a:off x="6267450" y="4767858"/>
+            <a:off x="6267450" y="4888855"/>
             <a:ext cx="1603177" cy="190500"/>
           </a:xfrm>
           <a:prstGeom prst="rect">
@@ -4380,7 +4595,7 @@
         </p:nvPicPr>
         <p:blipFill>
           <a:blip r:embed="rId2"/>
-          <a:srcRect t="7988" b="7988"/>
+          <a:srcRect/>
           <a:stretch>
             <a:fillRect/>
           </a:stretch>
@@ -4403,7 +4618,7 @@
         </p:nvSpPr>
         <p:spPr>
           <a:xfrm>
-            <a:off x="6267450" y="2144464"/>
+            <a:off x="6267450" y="2023467"/>
             <a:ext cx="1555998" cy="209550"/>
           </a:xfrm>
           <a:prstGeom prst="rect">
@@ -4445,7 +4660,7 @@
         </p:nvSpPr>
         <p:spPr>
           <a:xfrm>
-            <a:off x="6286500" y="2401639"/>
+            <a:off x="6286500" y="2280642"/>
             <a:ext cx="5410200" cy="705743"/>
           </a:xfrm>
           <a:prstGeom prst="rect">
@@ -4487,8 +4702,8 @@
         </p:nvSpPr>
         <p:spPr>
           <a:xfrm>
-            <a:off x="6286500" y="3164532"/>
-            <a:ext cx="5410200" cy="1044178"/>
+            <a:off x="6286500" y="3043535"/>
+            <a:ext cx="5410200" cy="1286173"/>
           </a:xfrm>
           <a:prstGeom prst="rect">
             <a:avLst/>
@@ -4516,7 +4731,7 @@
                 <a:ea typeface="Inter"/>
                 <a:cs typeface="Inter"/>
               </a:rPr>
-              <a:t>Белая бутса Nike Mercurial Victory линейки CR7 — с автографом. Рядом — кадр из сессии подписания: Роналду с этой моделью в руках. Фотография с предметом в руках героя — редкое дополнение, которое сразу отвечает на главный вопрос любого гостя вашего дома.</a:t>
+              <a:t>Белая бутса Nike Mercurial Victory линейки CR7 — с автографом. Единственный лот подборки, у которого сохранился кадр самой сессии подписания: Роналду держит в руках именно эту бутсу — следующий разворот. Оформлена в акриловый бокс на основании из зелёного мрамора.</a:t>
             </a:r>
           </a:p>
         </p:txBody>
@@ -4529,7 +4744,7 @@
         </p:nvSpPr>
         <p:spPr>
           <a:xfrm>
-            <a:off x="6267450" y="4303961"/>
+            <a:off x="6267450" y="4424958"/>
             <a:ext cx="1271588" cy="428625"/>
           </a:xfrm>
           <a:prstGeom prst="rect">
@@ -4633,7 +4848,7 @@
         </p:nvSpPr>
         <p:spPr>
           <a:xfrm>
-            <a:off x="10953750" y="3616077"/>
+            <a:off x="6534150" y="3055144"/>
             <a:ext cx="666750" cy="9525"/>
           </a:xfrm>
           <a:prstGeom prst="rect">
@@ -4671,7 +4886,7 @@
       </p:sp>
       <p:pic>
         <p:nvPicPr>
-          <p:cNvPr id="4" name="Picture 3" descr="m007.png"/>
+          <p:cNvPr id="4" name="Picture 3" descr="m007.jpg"/>
           <p:cNvPicPr>
             <a:picLocks noChangeAspect="1"/>
           </p:cNvPicPr>
@@ -4679,6 +4894,7 @@
         </p:nvPicPr>
         <p:blipFill>
           <a:blip r:embed="rId2"/>
+          <a:srcRect t="4473" b="11503"/>
           <a:stretch>
             <a:fillRect/>
           </a:stretch>
@@ -4686,7 +4902,7 @@
         <p:spPr>
           <a:xfrm>
             <a:off x="0" y="0"/>
-            <a:ext cx="12192000" cy="6858000"/>
+            <a:ext cx="6096000" cy="6858000"/>
           </a:xfrm>
           <a:prstGeom prst="rect">
             <a:avLst/>
@@ -4701,8 +4917,8 @@
         </p:nvSpPr>
         <p:spPr>
           <a:xfrm>
-            <a:off x="9463980" y="1434852"/>
-            <a:ext cx="2213670" cy="209550"/>
+            <a:off x="6496050" y="1575197"/>
+            <a:ext cx="2825800" cy="209550"/>
           </a:xfrm>
           <a:prstGeom prst="rect">
             <a:avLst/>
@@ -4715,13 +4931,13 @@
           </a:bodyPr>
           <a:lstStyle/>
           <a:p>
-            <a:pPr algn="r">
+            <a:pPr algn="l">
               <a:lnSpc>
                 <a:spcPts val="825"/>
               </a:lnSpc>
             </a:pPr>
             <a:r>
-              <a:rPr sz="819" b="0" i="0" spc="247">
+              <a:rPr sz="819" b="0" i="0" spc="297">
                 <a:solidFill>
                   <a:srgbClr val="C9A96A"/>
                 </a:solidFill>
@@ -4730,7 +4946,7 @@
                 <a:ea typeface="Inter"/>
                 <a:cs typeface="Inter"/>
               </a:rPr>
-              <a:t>МАДРИД · ЭЛЬ КЛАСИКО</a:t>
+              <a:t>ЛОТ 4 · СЕССИЯ ПОДПИСАНИЯ</a:t>
             </a:r>
           </a:p>
         </p:txBody>
@@ -4743,8 +4959,8 @@
         </p:nvSpPr>
         <p:spPr>
           <a:xfrm>
-            <a:off x="7675959" y="1787277"/>
-            <a:ext cx="3982641" cy="1619250"/>
+            <a:off x="6515100" y="1908572"/>
+            <a:ext cx="3491954" cy="956072"/>
           </a:xfrm>
           <a:prstGeom prst="rect">
             <a:avLst/>
@@ -4757,13 +4973,13 @@
           </a:bodyPr>
           <a:lstStyle/>
           <a:p>
-            <a:pPr algn="r">
+            <a:pPr algn="l">
               <a:lnSpc>
-                <a:spcPts val="4050"/>
+                <a:spcPts val="3465"/>
               </a:lnSpc>
             </a:pPr>
             <a:r>
-              <a:rPr sz="4050" b="0" i="0">
+              <a:rPr sz="3150" b="0" i="0">
                 <a:solidFill>
                   <a:srgbClr val="F5F1E8"/>
                 </a:solidFill>
@@ -4772,7 +4988,7 @@
                 <a:ea typeface="Cormorant Garamond"/>
                 <a:cs typeface="Cormorant Garamond"/>
               </a:rPr>
-              <a:t>Самый результативный в истории игры</a:t>
+              <a:t>Та самая бутса — в его руках</a:t>
             </a:r>
           </a:p>
         </p:txBody>
@@ -4785,8 +5001,8 @@
         </p:nvSpPr>
         <p:spPr>
           <a:xfrm>
-            <a:off x="7353746" y="3873252"/>
-            <a:ext cx="4304854" cy="1568946"/>
+            <a:off x="6515100" y="3293269"/>
+            <a:ext cx="3551783" cy="1372493"/>
           </a:xfrm>
           <a:prstGeom prst="rect">
             <a:avLst/>
@@ -4799,13 +5015,13 @@
           </a:bodyPr>
           <a:lstStyle/>
           <a:p>
-            <a:pPr algn="r">
+            <a:pPr algn="l">
               <a:lnSpc>
-                <a:spcPts val="2351"/>
+                <a:spcPts val="2042"/>
               </a:lnSpc>
             </a:pPr>
             <a:r>
-              <a:rPr sz="1420" b="0" i="0">
+              <a:rPr sz="1240" b="0" i="0">
                 <a:solidFill>
                   <a:srgbClr val="C9C3B7"/>
                 </a:solidFill>
@@ -4814,7 +5030,7 @@
                 <a:ea typeface="Inter"/>
                 <a:cs typeface="Inter"/>
               </a:rPr>
-              <a:t>Пять «Золотых мячей», четыре «Золотые бутсы», более девятисот голов за карьеру — и все они забиты в Mercurial. Бутса с его подписью — самый прямой предмет из возможных.</a:t>
+              <a:t>Кадр сделан в момент подписания: Роналду держит Mercurial Victory, которая затем уехала к владельцу. Совпадают росчерк, расположение логотипа Mercurial и рисунок верха — это один и тот же предмет.</a:t>
             </a:r>
           </a:p>
         </p:txBody>
@@ -4827,8 +5043,8 @@
         </p:nvSpPr>
         <p:spPr>
           <a:xfrm>
-            <a:off x="9597777" y="6619429"/>
-            <a:ext cx="2632323" cy="171450"/>
+            <a:off x="6515100" y="4799112"/>
+            <a:ext cx="3022253" cy="502741"/>
           </a:xfrm>
           <a:prstGeom prst="rect">
             <a:avLst/>
@@ -4843,20 +5059,20 @@
           <a:p>
             <a:pPr algn="l">
               <a:lnSpc>
-                <a:spcPts val="828"/>
+                <a:spcPts val="1680"/>
               </a:lnSpc>
             </a:pPr>
             <a:r>
-              <a:rPr sz="640" b="0" i="0" spc="51">
-                <a:solidFill>
-                  <a:srgbClr val="F5F1E8"/>
+              <a:rPr sz="1050" b="0" i="0">
+                <a:solidFill>
+                  <a:srgbClr val="8E887C"/>
                 </a:solidFill>
                 <a:latin typeface="Inter"/>
                 <a:latin typeface="Inter"/>
                 <a:ea typeface="Inter"/>
                 <a:cs typeface="Inter"/>
               </a:rPr>
-              <a:t>Фото: Jan S0L0 · Wikimedia Commons · CC BY-SA 2.0</a:t>
+              <a:t>Кадр передаётся вместе с лотом — в печати и в файле.</a:t>
             </a:r>
           </a:p>
         </p:txBody>
@@ -4894,7 +5110,7 @@
             <a:avLst/>
           </a:prstGeom>
           <a:solidFill>
-            <a:srgbClr val="FFFFFF"/>
+            <a:srgbClr val="0B0B0C"/>
           </a:solidFill>
           <a:ln>
             <a:noFill/>
@@ -4923,9 +5139,53 @@
           </a:p>
         </p:txBody>
       </p:sp>
+      <p:sp>
+        <p:nvSpPr>
+          <p:cNvPr id="3" name="Rectangle 2"/>
+          <p:cNvSpPr/>
+          <p:nvPr/>
+        </p:nvSpPr>
+        <p:spPr>
+          <a:xfrm>
+            <a:off x="10953750" y="3616077"/>
+            <a:ext cx="666750" cy="9525"/>
+          </a:xfrm>
+          <a:prstGeom prst="rect">
+            <a:avLst/>
+          </a:prstGeom>
+          <a:solidFill>
+            <a:srgbClr val="624E2B"/>
+          </a:solidFill>
+          <a:ln>
+            <a:noFill/>
+          </a:ln>
+          <a:effectLst/>
+        </p:spPr>
+        <p:style>
+          <a:lnRef idx="1">
+            <a:schemeClr val="accent1"/>
+          </a:lnRef>
+          <a:fillRef idx="3">
+            <a:schemeClr val="accent1"/>
+          </a:fillRef>
+          <a:effectRef idx="2">
+            <a:schemeClr val="accent1"/>
+          </a:effectRef>
+          <a:fontRef idx="minor">
+            <a:schemeClr val="lt1"/>
+          </a:fontRef>
+        </p:style>
+        <p:txBody>
+          <a:bodyPr rtlCol="0" anchor="ctr"/>
+          <a:lstStyle/>
+          <a:p>
+            <a:pPr algn="ctr"/>
+          </a:p>
+        </p:txBody>
+      </p:sp>
       <p:pic>
         <p:nvPicPr>
-          <p:cNvPr id="3" name="Picture 2" descr="m008.jpg"/>
+          <p:cNvPr id="4" name="Picture 3" descr="m008.png"/>
           <p:cNvPicPr>
             <a:picLocks noChangeAspect="1"/>
           </p:cNvPicPr>
@@ -4939,32 +5199,8 @@
         </p:blipFill>
         <p:spPr>
           <a:xfrm>
-            <a:off x="771706" y="1181100"/>
-            <a:ext cx="5538276" cy="4190851"/>
-          </a:xfrm>
-          <a:prstGeom prst="rect">
-            <a:avLst/>
-          </a:prstGeom>
-        </p:spPr>
-      </p:pic>
-      <p:pic>
-        <p:nvPicPr>
-          <p:cNvPr id="4" name="Picture 3" descr="m009.jpg"/>
-          <p:cNvPicPr>
-            <a:picLocks noChangeAspect="1"/>
-          </p:cNvPicPr>
-          <p:nvPr/>
-        </p:nvPicPr>
-        <p:blipFill>
-          <a:blip r:embed="rId3"/>
-          <a:stretch>
-            <a:fillRect/>
-          </a:stretch>
-        </p:blipFill>
-        <p:spPr>
-          <a:xfrm>
-            <a:off x="6834245" y="1469678"/>
-            <a:ext cx="4671898" cy="3613696"/>
+            <a:off x="0" y="0"/>
+            <a:ext cx="12192000" cy="6858000"/>
           </a:xfrm>
           <a:prstGeom prst="rect">
             <a:avLst/>
@@ -4979,8 +5215,8 @@
         </p:nvSpPr>
         <p:spPr>
           <a:xfrm>
-            <a:off x="647700" y="266700"/>
-            <a:ext cx="2769840" cy="400050"/>
+            <a:off x="9463980" y="1434852"/>
+            <a:ext cx="2213670" cy="209550"/>
           </a:xfrm>
           <a:prstGeom prst="rect">
             <a:avLst/>
@@ -4993,36 +5229,78 @@
           </a:bodyPr>
           <a:lstStyle/>
           <a:p>
-            <a:pPr algn="l">
+            <a:pPr algn="r">
               <a:lnSpc>
-                <a:spcPts val="2520"/>
+                <a:spcPts val="825"/>
               </a:lnSpc>
             </a:pPr>
             <a:r>
-              <a:rPr sz="2100" b="0" i="0">
-                <a:solidFill>
-                  <a:srgbClr val="1A1A1A"/>
+              <a:rPr sz="819" b="0" i="0" spc="247">
+                <a:solidFill>
+                  <a:srgbClr val="C9A96A"/>
+                </a:solidFill>
+                <a:latin typeface="Inter"/>
+                <a:latin typeface="Inter"/>
+                <a:ea typeface="Inter"/>
+                <a:cs typeface="Inter"/>
+              </a:rPr>
+              <a:t>МАДРИД · ЭЛЬ КЛАСИКО</a:t>
+            </a:r>
+          </a:p>
+        </p:txBody>
+      </p:sp>
+      <p:sp>
+        <p:nvSpPr>
+          <p:cNvPr id="6" name="TextBox 5"/>
+          <p:cNvSpPr txBox="1"/>
+          <p:nvPr/>
+        </p:nvSpPr>
+        <p:spPr>
+          <a:xfrm>
+            <a:off x="7675959" y="1787277"/>
+            <a:ext cx="3982641" cy="1619250"/>
+          </a:xfrm>
+          <a:prstGeom prst="rect">
+            <a:avLst/>
+          </a:prstGeom>
+          <a:noFill/>
+        </p:spPr>
+        <p:txBody>
+          <a:bodyPr wrap="square" lIns="0" rIns="0" tIns="0" bIns="0" anchor="t">
+            <a:noAutofit/>
+          </a:bodyPr>
+          <a:lstStyle/>
+          <a:p>
+            <a:pPr algn="r">
+              <a:lnSpc>
+                <a:spcPts val="4050"/>
+              </a:lnSpc>
+            </a:pPr>
+            <a:r>
+              <a:rPr sz="4050" b="0" i="0">
+                <a:solidFill>
+                  <a:srgbClr val="F5F1E8"/>
                 </a:solidFill>
                 <a:latin typeface="Cormorant Garamond"/>
                 <a:latin typeface="Cormorant Garamond"/>
                 <a:ea typeface="Cormorant Garamond"/>
                 <a:cs typeface="Cormorant Garamond"/>
               </a:rPr>
-              <a:t>Как мы отдаём подарок</a:t>
-            </a:r>
-          </a:p>
-        </p:txBody>
-      </p:sp>
-      <p:sp>
-        <p:nvSpPr>
-          <p:cNvPr id="6" name="TextBox 5"/>
+              <a:t>Самый результативный в истории игры</a:t>
+            </a:r>
+          </a:p>
+        </p:txBody>
+      </p:sp>
+      <p:sp>
+        <p:nvSpPr>
+          <p:cNvPr id="7" name="TextBox 6"/>
           <p:cNvSpPr txBox="1"/>
           <p:nvPr/>
         </p:nvSpPr>
         <p:spPr>
           <a:xfrm>
-            <a:off x="9994106" y="409575"/>
-            <a:ext cx="1702594" cy="209550"/>
+            <a:off x="7353746" y="3873252"/>
+            <a:ext cx="4304854" cy="1568946"/>
           </a:xfrm>
           <a:prstGeom prst="rect">
             <a:avLst/>
@@ -5035,36 +5313,36 @@
           </a:bodyPr>
           <a:lstStyle/>
           <a:p>
-            <a:pPr algn="l">
+            <a:pPr algn="r">
               <a:lnSpc>
-                <a:spcPts val="825"/>
+                <a:spcPts val="2351"/>
               </a:lnSpc>
             </a:pPr>
             <a:r>
-              <a:rPr sz="819" b="0" i="0" spc="165">
-                <a:solidFill>
-                  <a:srgbClr val="A98545"/>
+              <a:rPr sz="1420" b="0" i="0">
+                <a:solidFill>
+                  <a:srgbClr val="C9C3B7"/>
                 </a:solidFill>
                 <a:latin typeface="Inter"/>
                 <a:latin typeface="Inter"/>
                 <a:ea typeface="Inter"/>
                 <a:cs typeface="Inter"/>
               </a:rPr>
-              <a:t>УПАКОВКА STARGIFT</a:t>
-            </a:r>
-          </a:p>
-        </p:txBody>
-      </p:sp>
-      <p:sp>
-        <p:nvSpPr>
-          <p:cNvPr id="7" name="TextBox 6"/>
+              <a:t>Пять «Золотых мячей», четыре «Золотые бутсы», более девятисот голов за карьеру — и все они забиты в Mercurial. Бутса с его подписью — самый прямой предмет из возможных.</a:t>
+            </a:r>
+          </a:p>
+        </p:txBody>
+      </p:sp>
+      <p:sp>
+        <p:nvSpPr>
+          <p:cNvPr id="8" name="TextBox 7"/>
           <p:cNvSpPr txBox="1"/>
           <p:nvPr/>
         </p:nvSpPr>
         <p:spPr>
           <a:xfrm>
-            <a:off x="-19050" y="6057900"/>
-            <a:ext cx="8882062" cy="857250"/>
+            <a:off x="9597777" y="6619429"/>
+            <a:ext cx="2632323" cy="171450"/>
           </a:xfrm>
           <a:prstGeom prst="rect">
             <a:avLst/>
@@ -5079,20 +5357,20 @@
           <a:p>
             <a:pPr algn="l">
               <a:lnSpc>
-                <a:spcPts val="1800"/>
+                <a:spcPts val="828"/>
               </a:lnSpc>
             </a:pPr>
             <a:r>
-              <a:rPr sz="1120" b="0" i="0">
-                <a:solidFill>
-                  <a:srgbClr val="4A4A4A"/>
+              <a:rPr sz="640" b="0" i="0" spc="51">
+                <a:solidFill>
+                  <a:srgbClr val="F5F1E8"/>
                 </a:solidFill>
                 <a:latin typeface="Inter"/>
                 <a:latin typeface="Inter"/>
                 <a:ea typeface="Inter"/>
                 <a:cs typeface="Inter"/>
               </a:rPr>
-              <a:t>Каждый предмет уходит в фирменной упаковке дома: крафт-бумага с автографами великих, лента Stargift и плотный подарочный пакет. Подарок можно вручать сразу — прямо из рук в руки.</a:t>
+              <a:t>Фото: Jan S0L0 · Wikimedia Commons · CC BY-SA 2.0</a:t>
             </a:r>
           </a:p>
         </p:txBody>
@@ -5130,7 +5408,7 @@
             <a:avLst/>
           </a:prstGeom>
           <a:solidFill>
-            <a:srgbClr val="0B0B0C"/>
+            <a:srgbClr val="FFFFFF"/>
           </a:solidFill>
           <a:ln>
             <a:noFill/>
@@ -5159,192 +5437,106 @@
           </a:p>
         </p:txBody>
       </p:sp>
-      <p:sp>
-        <p:nvSpPr>
-          <p:cNvPr id="3" name="Rectangle 2"/>
-          <p:cNvSpPr/>
-          <p:nvPr/>
-        </p:nvSpPr>
-        <p:spPr>
-          <a:xfrm>
-            <a:off x="628650" y="1695450"/>
-            <a:ext cx="10934700" cy="9525"/>
-          </a:xfrm>
-          <a:prstGeom prst="rect">
-            <a:avLst/>
-          </a:prstGeom>
-          <a:solidFill>
-            <a:srgbClr val="2B2317"/>
-          </a:solidFill>
-          <a:ln>
-            <a:noFill/>
-          </a:ln>
-          <a:effectLst/>
-        </p:spPr>
-        <p:style>
-          <a:lnRef idx="1">
-            <a:schemeClr val="accent1"/>
-          </a:lnRef>
-          <a:fillRef idx="3">
-            <a:schemeClr val="accent1"/>
-          </a:fillRef>
-          <a:effectRef idx="2">
-            <a:schemeClr val="accent1"/>
-          </a:effectRef>
-          <a:fontRef idx="minor">
-            <a:schemeClr val="lt1"/>
-          </a:fontRef>
-        </p:style>
-        <p:txBody>
-          <a:bodyPr rtlCol="0" anchor="ctr"/>
-          <a:lstStyle/>
-          <a:p>
-            <a:pPr algn="ctr"/>
-          </a:p>
-        </p:txBody>
-      </p:sp>
-      <p:sp>
-        <p:nvSpPr>
-          <p:cNvPr id="4" name="Rectangle 3"/>
-          <p:cNvSpPr/>
-          <p:nvPr/>
-        </p:nvSpPr>
-        <p:spPr>
-          <a:xfrm>
-            <a:off x="628650" y="3286125"/>
-            <a:ext cx="10934700" cy="9525"/>
-          </a:xfrm>
-          <a:prstGeom prst="rect">
-            <a:avLst/>
-          </a:prstGeom>
-          <a:solidFill>
-            <a:srgbClr val="2B2317"/>
-          </a:solidFill>
-          <a:ln>
-            <a:noFill/>
-          </a:ln>
-          <a:effectLst/>
-        </p:spPr>
-        <p:style>
-          <a:lnRef idx="1">
-            <a:schemeClr val="accent1"/>
-          </a:lnRef>
-          <a:fillRef idx="3">
-            <a:schemeClr val="accent1"/>
-          </a:fillRef>
-          <a:effectRef idx="2">
-            <a:schemeClr val="accent1"/>
-          </a:effectRef>
-          <a:fontRef idx="minor">
-            <a:schemeClr val="lt1"/>
-          </a:fontRef>
-        </p:style>
-        <p:txBody>
-          <a:bodyPr rtlCol="0" anchor="ctr"/>
-          <a:lstStyle/>
-          <a:p>
-            <a:pPr algn="ctr"/>
-          </a:p>
-        </p:txBody>
-      </p:sp>
-      <p:sp>
-        <p:nvSpPr>
-          <p:cNvPr id="5" name="Rectangle 4"/>
-          <p:cNvSpPr/>
-          <p:nvPr/>
-        </p:nvSpPr>
-        <p:spPr>
-          <a:xfrm>
-            <a:off x="628650" y="4876800"/>
-            <a:ext cx="10934700" cy="9525"/>
-          </a:xfrm>
-          <a:prstGeom prst="rect">
-            <a:avLst/>
-          </a:prstGeom>
-          <a:solidFill>
-            <a:srgbClr val="2B2317"/>
-          </a:solidFill>
-          <a:ln>
-            <a:noFill/>
-          </a:ln>
-          <a:effectLst/>
-        </p:spPr>
-        <p:style>
-          <a:lnRef idx="1">
-            <a:schemeClr val="accent1"/>
-          </a:lnRef>
-          <a:fillRef idx="3">
-            <a:schemeClr val="accent1"/>
-          </a:fillRef>
-          <a:effectRef idx="2">
-            <a:schemeClr val="accent1"/>
-          </a:effectRef>
-          <a:fontRef idx="minor">
-            <a:schemeClr val="lt1"/>
-          </a:fontRef>
-        </p:style>
-        <p:txBody>
-          <a:bodyPr rtlCol="0" anchor="ctr"/>
-          <a:lstStyle/>
-          <a:p>
-            <a:pPr algn="ctr"/>
-          </a:p>
-        </p:txBody>
-      </p:sp>
-      <p:sp>
-        <p:nvSpPr>
-          <p:cNvPr id="6" name="Rectangle 5"/>
-          <p:cNvSpPr/>
-          <p:nvPr/>
-        </p:nvSpPr>
-        <p:spPr>
-          <a:xfrm>
-            <a:off x="628650" y="6467475"/>
-            <a:ext cx="10934700" cy="9525"/>
-          </a:xfrm>
-          <a:prstGeom prst="rect">
-            <a:avLst/>
-          </a:prstGeom>
-          <a:solidFill>
-            <a:srgbClr val="2B2317"/>
-          </a:solidFill>
-          <a:ln>
-            <a:noFill/>
-          </a:ln>
-          <a:effectLst/>
-        </p:spPr>
-        <p:style>
-          <a:lnRef idx="1">
-            <a:schemeClr val="accent1"/>
-          </a:lnRef>
-          <a:fillRef idx="3">
-            <a:schemeClr val="accent1"/>
-          </a:fillRef>
-          <a:effectRef idx="2">
-            <a:schemeClr val="accent1"/>
-          </a:effectRef>
-          <a:fontRef idx="minor">
-            <a:schemeClr val="lt1"/>
-          </a:fontRef>
-        </p:style>
-        <p:txBody>
-          <a:bodyPr rtlCol="0" anchor="ctr"/>
-          <a:lstStyle/>
-          <a:p>
-            <a:pPr algn="ctr"/>
-          </a:p>
-        </p:txBody>
-      </p:sp>
-      <p:sp>
-        <p:nvSpPr>
-          <p:cNvPr id="7" name="TextBox 6"/>
+      <p:pic>
+        <p:nvPicPr>
+          <p:cNvPr id="3" name="Picture 2" descr="m009.jpg"/>
+          <p:cNvPicPr>
+            <a:picLocks noChangeAspect="1"/>
+          </p:cNvPicPr>
+          <p:nvPr/>
+        </p:nvPicPr>
+        <p:blipFill>
+          <a:blip r:embed="rId2"/>
+          <a:stretch>
+            <a:fillRect/>
+          </a:stretch>
+        </p:blipFill>
+        <p:spPr>
+          <a:xfrm>
+            <a:off x="771706" y="1181100"/>
+            <a:ext cx="5538276" cy="4190851"/>
+          </a:xfrm>
+          <a:prstGeom prst="rect">
+            <a:avLst/>
+          </a:prstGeom>
+        </p:spPr>
+      </p:pic>
+      <p:pic>
+        <p:nvPicPr>
+          <p:cNvPr id="4" name="Picture 3" descr="m010.jpg"/>
+          <p:cNvPicPr>
+            <a:picLocks noChangeAspect="1"/>
+          </p:cNvPicPr>
+          <p:nvPr/>
+        </p:nvPicPr>
+        <p:blipFill>
+          <a:blip r:embed="rId3"/>
+          <a:stretch>
+            <a:fillRect/>
+          </a:stretch>
+        </p:blipFill>
+        <p:spPr>
+          <a:xfrm>
+            <a:off x="6834245" y="1469678"/>
+            <a:ext cx="4671898" cy="3613696"/>
+          </a:xfrm>
+          <a:prstGeom prst="rect">
+            <a:avLst/>
+          </a:prstGeom>
+        </p:spPr>
+      </p:pic>
+      <p:sp>
+        <p:nvSpPr>
+          <p:cNvPr id="5" name="TextBox 4"/>
           <p:cNvSpPr txBox="1"/>
           <p:nvPr/>
         </p:nvSpPr>
         <p:spPr>
           <a:xfrm>
-            <a:off x="590550" y="381000"/>
-            <a:ext cx="2009775" cy="209550"/>
+            <a:off x="647700" y="266700"/>
+            <a:ext cx="2769840" cy="400050"/>
+          </a:xfrm>
+          <a:prstGeom prst="rect">
+            <a:avLst/>
+          </a:prstGeom>
+          <a:noFill/>
+        </p:spPr>
+        <p:txBody>
+          <a:bodyPr wrap="square" lIns="0" rIns="0" tIns="0" bIns="0" anchor="t">
+            <a:noAutofit/>
+          </a:bodyPr>
+          <a:lstStyle/>
+          <a:p>
+            <a:pPr algn="l">
+              <a:lnSpc>
+                <a:spcPts val="2520"/>
+              </a:lnSpc>
+            </a:pPr>
+            <a:r>
+              <a:rPr sz="2100" b="0" i="0">
+                <a:solidFill>
+                  <a:srgbClr val="1A1A1A"/>
+                </a:solidFill>
+                <a:latin typeface="Cormorant Garamond"/>
+                <a:latin typeface="Cormorant Garamond"/>
+                <a:ea typeface="Cormorant Garamond"/>
+                <a:cs typeface="Cormorant Garamond"/>
+              </a:rPr>
+              <a:t>Как мы отдаём подарок</a:t>
+            </a:r>
+          </a:p>
+        </p:txBody>
+      </p:sp>
+      <p:sp>
+        <p:nvSpPr>
+          <p:cNvPr id="6" name="TextBox 5"/>
+          <p:cNvSpPr txBox="1"/>
+          <p:nvPr/>
+        </p:nvSpPr>
+        <p:spPr>
+          <a:xfrm>
+            <a:off x="9994106" y="409575"/>
+            <a:ext cx="1702594" cy="209550"/>
           </a:xfrm>
           <a:prstGeom prst="rect">
             <a:avLst/>
@@ -5363,30 +5555,30 @@
               </a:lnSpc>
             </a:pPr>
             <a:r>
-              <a:rPr sz="819" b="0" i="0" spc="297">
-                <a:solidFill>
-                  <a:srgbClr val="C9A96A"/>
+              <a:rPr sz="819" b="0" i="0" spc="165">
+                <a:solidFill>
+                  <a:srgbClr val="A98545"/>
                 </a:solidFill>
                 <a:latin typeface="Inter"/>
                 <a:latin typeface="Inter"/>
                 <a:ea typeface="Inter"/>
                 <a:cs typeface="Inter"/>
               </a:rPr>
-              <a:t>ПОДБОРКА ЦЕЛИКОМ</a:t>
-            </a:r>
-          </a:p>
-        </p:txBody>
-      </p:sp>
-      <p:sp>
-        <p:nvSpPr>
-          <p:cNvPr id="8" name="TextBox 7"/>
+              <a:t>УПАКОВКА STARGIFT</a:t>
+            </a:r>
+          </a:p>
+        </p:txBody>
+      </p:sp>
+      <p:sp>
+        <p:nvSpPr>
+          <p:cNvPr id="7" name="TextBox 6"/>
           <p:cNvSpPr txBox="1"/>
           <p:nvPr/>
         </p:nvSpPr>
         <p:spPr>
           <a:xfrm>
-            <a:off x="590550" y="571500"/>
-            <a:ext cx="2067669" cy="590550"/>
+            <a:off x="-19050" y="6057900"/>
+            <a:ext cx="8882062" cy="857250"/>
           </a:xfrm>
           <a:prstGeom prst="rect">
             <a:avLst/>
@@ -5401,356 +5593,20 @@
           <a:p>
             <a:pPr algn="l">
               <a:lnSpc>
-                <a:spcPts val="3300"/>
+                <a:spcPts val="1800"/>
               </a:lnSpc>
             </a:pPr>
             <a:r>
-              <a:rPr sz="3300" b="0" i="0">
-                <a:solidFill>
-                  <a:srgbClr val="F5F1E8"/>
-                </a:solidFill>
-                <a:latin typeface="Cormorant Garamond"/>
-                <a:latin typeface="Cormorant Garamond"/>
-                <a:ea typeface="Cormorant Garamond"/>
-                <a:cs typeface="Cormorant Garamond"/>
-              </a:rPr>
-              <a:t>4 предмета</a:t>
-            </a:r>
-          </a:p>
-        </p:txBody>
-      </p:sp>
-      <p:sp>
-        <p:nvSpPr>
-          <p:cNvPr id="9" name="TextBox 8"/>
-          <p:cNvSpPr txBox="1"/>
-          <p:nvPr/>
-        </p:nvSpPr>
-        <p:spPr>
-          <a:xfrm>
-            <a:off x="590550" y="1381125"/>
-            <a:ext cx="7077521" cy="257175"/>
-          </a:xfrm>
-          <a:prstGeom prst="rect">
-            <a:avLst/>
-          </a:prstGeom>
-          <a:noFill/>
-        </p:spPr>
-        <p:txBody>
-          <a:bodyPr wrap="square" lIns="0" rIns="0" tIns="0" bIns="0" anchor="t">
-            <a:noAutofit/>
-          </a:bodyPr>
-          <a:lstStyle/>
-          <a:p>
-            <a:pPr algn="l">
-              <a:lnSpc>
-                <a:spcPts val="1519"/>
-              </a:lnSpc>
-            </a:pPr>
-            <a:r>
               <a:rPr sz="1120" b="0" i="0">
                 <a:solidFill>
-                  <a:srgbClr val="D5CFC3"/>
+                  <a:srgbClr val="4A4A4A"/>
                 </a:solidFill>
                 <a:latin typeface="Inter"/>
                 <a:latin typeface="Inter"/>
                 <a:ea typeface="Inter"/>
                 <a:cs typeface="Inter"/>
               </a:rPr>
-              <a:t>Криштиану Роналду — бутса Nike Mercurial CR7 с автографом, подпись при представителе Beckett</a:t>
-            </a:r>
-          </a:p>
-        </p:txBody>
-      </p:sp>
-      <p:sp>
-        <p:nvSpPr>
-          <p:cNvPr id="10" name="TextBox 9"/>
-          <p:cNvSpPr txBox="1"/>
-          <p:nvPr/>
-        </p:nvSpPr>
-        <p:spPr>
-          <a:xfrm>
-            <a:off x="10782449" y="1343025"/>
-            <a:ext cx="971401" cy="314325"/>
-          </a:xfrm>
-          <a:prstGeom prst="rect">
-            <a:avLst/>
-          </a:prstGeom>
-          <a:noFill/>
-        </p:spPr>
-        <p:txBody>
-          <a:bodyPr wrap="square" lIns="0" rIns="0" tIns="0" bIns="0" anchor="t">
-            <a:noAutofit/>
-          </a:bodyPr>
-          <a:lstStyle/>
-          <a:p>
-            <a:pPr algn="l">
-              <a:lnSpc>
-                <a:spcPts val="1889"/>
-              </a:lnSpc>
-            </a:pPr>
-            <a:r>
-              <a:rPr sz="1580" b="0" i="0">
-                <a:solidFill>
-                  <a:srgbClr val="C9A96A"/>
-                </a:solidFill>
-                <a:latin typeface="Cormorant Garamond"/>
-                <a:latin typeface="Cormorant Garamond"/>
-                <a:ea typeface="Cormorant Garamond"/>
-                <a:cs typeface="Cormorant Garamond"/>
-              </a:rPr>
-              <a:t>590 000 ₽</a:t>
-            </a:r>
-          </a:p>
-        </p:txBody>
-      </p:sp>
-      <p:sp>
-        <p:nvSpPr>
-          <p:cNvPr id="11" name="TextBox 10"/>
-          <p:cNvSpPr txBox="1"/>
-          <p:nvPr/>
-        </p:nvSpPr>
-        <p:spPr>
-          <a:xfrm>
-            <a:off x="590550" y="2971800"/>
-            <a:ext cx="5152281" cy="257175"/>
-          </a:xfrm>
-          <a:prstGeom prst="rect">
-            <a:avLst/>
-          </a:prstGeom>
-          <a:noFill/>
-        </p:spPr>
-        <p:txBody>
-          <a:bodyPr wrap="square" lIns="0" rIns="0" tIns="0" bIns="0" anchor="t">
-            <a:noAutofit/>
-          </a:bodyPr>
-          <a:lstStyle/>
-          <a:p>
-            <a:pPr algn="l">
-              <a:lnSpc>
-                <a:spcPts val="1519"/>
-              </a:lnSpc>
-            </a:pPr>
-            <a:r>
-              <a:rPr sz="1120" b="0" i="0">
-                <a:solidFill>
-                  <a:srgbClr val="D5CFC3"/>
-                </a:solidFill>
-                <a:latin typeface="Inter"/>
-                <a:latin typeface="Inter"/>
-                <a:ea typeface="Inter"/>
-                <a:cs typeface="Inter"/>
-              </a:rPr>
-              <a:t>Криштиану Роналду — бутса Nike Mercurial Dream Speed с автографом</a:t>
-            </a:r>
-          </a:p>
-        </p:txBody>
-      </p:sp>
-      <p:sp>
-        <p:nvSpPr>
-          <p:cNvPr id="12" name="TextBox 11"/>
-          <p:cNvSpPr txBox="1"/>
-          <p:nvPr/>
-        </p:nvSpPr>
-        <p:spPr>
-          <a:xfrm>
-            <a:off x="10795099" y="2933700"/>
-            <a:ext cx="958751" cy="314325"/>
-          </a:xfrm>
-          <a:prstGeom prst="rect">
-            <a:avLst/>
-          </a:prstGeom>
-          <a:noFill/>
-        </p:spPr>
-        <p:txBody>
-          <a:bodyPr wrap="square" lIns="0" rIns="0" tIns="0" bIns="0" anchor="t">
-            <a:noAutofit/>
-          </a:bodyPr>
-          <a:lstStyle/>
-          <a:p>
-            <a:pPr algn="l">
-              <a:lnSpc>
-                <a:spcPts val="1889"/>
-              </a:lnSpc>
-            </a:pPr>
-            <a:r>
-              <a:rPr sz="1580" b="0" i="0">
-                <a:solidFill>
-                  <a:srgbClr val="C9A96A"/>
-                </a:solidFill>
-                <a:latin typeface="Cormorant Garamond"/>
-                <a:latin typeface="Cormorant Garamond"/>
-                <a:ea typeface="Cormorant Garamond"/>
-                <a:cs typeface="Cormorant Garamond"/>
-              </a:rPr>
-              <a:t>520 000 ₽</a:t>
-            </a:r>
-          </a:p>
-        </p:txBody>
-      </p:sp>
-      <p:sp>
-        <p:nvSpPr>
-          <p:cNvPr id="13" name="TextBox 12"/>
-          <p:cNvSpPr txBox="1"/>
-          <p:nvPr/>
-        </p:nvSpPr>
-        <p:spPr>
-          <a:xfrm>
-            <a:off x="590550" y="4562475"/>
-            <a:ext cx="5427762" cy="257175"/>
-          </a:xfrm>
-          <a:prstGeom prst="rect">
-            <a:avLst/>
-          </a:prstGeom>
-          <a:noFill/>
-        </p:spPr>
-        <p:txBody>
-          <a:bodyPr wrap="square" lIns="0" rIns="0" tIns="0" bIns="0" anchor="t">
-            <a:noAutofit/>
-          </a:bodyPr>
-          <a:lstStyle/>
-          <a:p>
-            <a:pPr algn="l">
-              <a:lnSpc>
-                <a:spcPts val="1519"/>
-              </a:lnSpc>
-            </a:pPr>
-            <a:r>
-              <a:rPr sz="1120" b="0" i="0">
-                <a:solidFill>
-                  <a:srgbClr val="D5CFC3"/>
-                </a:solidFill>
-                <a:latin typeface="Inter"/>
-                <a:latin typeface="Inter"/>
-                <a:ea typeface="Inter"/>
-                <a:cs typeface="Inter"/>
-              </a:rPr>
-              <a:t>Криштиану Роналду — бутса Nike Mercurial с автографом (Лиссабон, 2018)</a:t>
-            </a:r>
-          </a:p>
-        </p:txBody>
-      </p:sp>
-      <p:sp>
-        <p:nvSpPr>
-          <p:cNvPr id="14" name="TextBox 13"/>
-          <p:cNvSpPr txBox="1"/>
-          <p:nvPr/>
-        </p:nvSpPr>
-        <p:spPr>
-          <a:xfrm>
-            <a:off x="10795099" y="4524375"/>
-            <a:ext cx="958751" cy="314325"/>
-          </a:xfrm>
-          <a:prstGeom prst="rect">
-            <a:avLst/>
-          </a:prstGeom>
-          <a:noFill/>
-        </p:spPr>
-        <p:txBody>
-          <a:bodyPr wrap="square" lIns="0" rIns="0" tIns="0" bIns="0" anchor="t">
-            <a:noAutofit/>
-          </a:bodyPr>
-          <a:lstStyle/>
-          <a:p>
-            <a:pPr algn="l">
-              <a:lnSpc>
-                <a:spcPts val="1889"/>
-              </a:lnSpc>
-            </a:pPr>
-            <a:r>
-              <a:rPr sz="1580" b="0" i="0">
-                <a:solidFill>
-                  <a:srgbClr val="C9A96A"/>
-                </a:solidFill>
-                <a:latin typeface="Cormorant Garamond"/>
-                <a:latin typeface="Cormorant Garamond"/>
-                <a:ea typeface="Cormorant Garamond"/>
-                <a:cs typeface="Cormorant Garamond"/>
-              </a:rPr>
-              <a:t>520 000 ₽</a:t>
-            </a:r>
-          </a:p>
-        </p:txBody>
-      </p:sp>
-      <p:sp>
-        <p:nvSpPr>
-          <p:cNvPr id="15" name="TextBox 14"/>
-          <p:cNvSpPr txBox="1"/>
-          <p:nvPr/>
-        </p:nvSpPr>
-        <p:spPr>
-          <a:xfrm>
-            <a:off x="590550" y="6153150"/>
-            <a:ext cx="5028456" cy="257175"/>
-          </a:xfrm>
-          <a:prstGeom prst="rect">
-            <a:avLst/>
-          </a:prstGeom>
-          <a:noFill/>
-        </p:spPr>
-        <p:txBody>
-          <a:bodyPr wrap="square" lIns="0" rIns="0" tIns="0" bIns="0" anchor="t">
-            <a:noAutofit/>
-          </a:bodyPr>
-          <a:lstStyle/>
-          <a:p>
-            <a:pPr algn="l">
-              <a:lnSpc>
-                <a:spcPts val="1519"/>
-              </a:lnSpc>
-            </a:pPr>
-            <a:r>
-              <a:rPr sz="1120" b="0" i="0">
-                <a:solidFill>
-                  <a:srgbClr val="D5CFC3"/>
-                </a:solidFill>
-                <a:latin typeface="Inter"/>
-                <a:latin typeface="Inter"/>
-                <a:ea typeface="Inter"/>
-                <a:cs typeface="Inter"/>
-              </a:rPr>
-              <a:t>Криштиану Роналду — бутса Nike Mercurial Victory CR7 с автографом</a:t>
-            </a:r>
-          </a:p>
-        </p:txBody>
-      </p:sp>
-      <p:sp>
-        <p:nvSpPr>
-          <p:cNvPr id="16" name="TextBox 15"/>
-          <p:cNvSpPr txBox="1"/>
-          <p:nvPr/>
-        </p:nvSpPr>
-        <p:spPr>
-          <a:xfrm>
-            <a:off x="10795099" y="6115050"/>
-            <a:ext cx="958751" cy="314325"/>
-          </a:xfrm>
-          <a:prstGeom prst="rect">
-            <a:avLst/>
-          </a:prstGeom>
-          <a:noFill/>
-        </p:spPr>
-        <p:txBody>
-          <a:bodyPr wrap="square" lIns="0" rIns="0" tIns="0" bIns="0" anchor="t">
-            <a:noAutofit/>
-          </a:bodyPr>
-          <a:lstStyle/>
-          <a:p>
-            <a:pPr algn="l">
-              <a:lnSpc>
-                <a:spcPts val="1889"/>
-              </a:lnSpc>
-            </a:pPr>
-            <a:r>
-              <a:rPr sz="1580" b="0" i="0">
-                <a:solidFill>
-                  <a:srgbClr val="C9A96A"/>
-                </a:solidFill>
-                <a:latin typeface="Cormorant Garamond"/>
-                <a:latin typeface="Cormorant Garamond"/>
-                <a:ea typeface="Cormorant Garamond"/>
-                <a:cs typeface="Cormorant Garamond"/>
-              </a:rPr>
-              <a:t>520 000 ₽</a:t>
+              <a:t>Каждый предмет уходит в фирменной упаковке дома: крафт-бумага с автографами великих, лента Stargift и плотный подарочный пакет. Подарок можно вручать сразу — прямо из рук в руки.</a:t>
             </a:r>
           </a:p>
         </p:txBody>
@@ -5825,14 +5681,14 @@
         </p:nvSpPr>
         <p:spPr>
           <a:xfrm>
-            <a:off x="0" y="6115050"/>
-            <a:ext cx="12192000" cy="9525"/>
+            <a:off x="628650" y="1695450"/>
+            <a:ext cx="10934700" cy="9525"/>
           </a:xfrm>
           <a:prstGeom prst="rect">
             <a:avLst/>
           </a:prstGeom>
           <a:solidFill>
-            <a:srgbClr val="3A301D"/>
+            <a:srgbClr val="2B2317"/>
           </a:solidFill>
           <a:ln>
             <a:noFill/>
@@ -5861,40 +5717,148 @@
           </a:p>
         </p:txBody>
       </p:sp>
-      <p:pic>
-        <p:nvPicPr>
-          <p:cNvPr id="4" name="Picture 3" descr="m010.png"/>
-          <p:cNvPicPr>
-            <a:picLocks noChangeAspect="1"/>
-          </p:cNvPicPr>
-          <p:nvPr/>
-        </p:nvPicPr>
-        <p:blipFill>
-          <a:blip r:embed="rId2"/>
-          <a:stretch>
-            <a:fillRect/>
-          </a:stretch>
-        </p:blipFill>
-        <p:spPr>
-          <a:xfrm>
-            <a:off x="685800" y="2043721"/>
-            <a:ext cx="1830437" cy="1390624"/>
-          </a:xfrm>
-          <a:prstGeom prst="rect">
-            <a:avLst/>
-          </a:prstGeom>
-        </p:spPr>
-      </p:pic>
-      <p:sp>
-        <p:nvSpPr>
-          <p:cNvPr id="5" name="TextBox 4"/>
+      <p:sp>
+        <p:nvSpPr>
+          <p:cNvPr id="4" name="Rectangle 3"/>
+          <p:cNvSpPr/>
+          <p:nvPr/>
+        </p:nvSpPr>
+        <p:spPr>
+          <a:xfrm>
+            <a:off x="628650" y="3286125"/>
+            <a:ext cx="10934700" cy="9525"/>
+          </a:xfrm>
+          <a:prstGeom prst="rect">
+            <a:avLst/>
+          </a:prstGeom>
+          <a:solidFill>
+            <a:srgbClr val="2B2317"/>
+          </a:solidFill>
+          <a:ln>
+            <a:noFill/>
+          </a:ln>
+          <a:effectLst/>
+        </p:spPr>
+        <p:style>
+          <a:lnRef idx="1">
+            <a:schemeClr val="accent1"/>
+          </a:lnRef>
+          <a:fillRef idx="3">
+            <a:schemeClr val="accent1"/>
+          </a:fillRef>
+          <a:effectRef idx="2">
+            <a:schemeClr val="accent1"/>
+          </a:effectRef>
+          <a:fontRef idx="minor">
+            <a:schemeClr val="lt1"/>
+          </a:fontRef>
+        </p:style>
+        <p:txBody>
+          <a:bodyPr rtlCol="0" anchor="ctr"/>
+          <a:lstStyle/>
+          <a:p>
+            <a:pPr algn="ctr"/>
+          </a:p>
+        </p:txBody>
+      </p:sp>
+      <p:sp>
+        <p:nvSpPr>
+          <p:cNvPr id="5" name="Rectangle 4"/>
+          <p:cNvSpPr/>
+          <p:nvPr/>
+        </p:nvSpPr>
+        <p:spPr>
+          <a:xfrm>
+            <a:off x="628650" y="4876800"/>
+            <a:ext cx="10934700" cy="9525"/>
+          </a:xfrm>
+          <a:prstGeom prst="rect">
+            <a:avLst/>
+          </a:prstGeom>
+          <a:solidFill>
+            <a:srgbClr val="2B2317"/>
+          </a:solidFill>
+          <a:ln>
+            <a:noFill/>
+          </a:ln>
+          <a:effectLst/>
+        </p:spPr>
+        <p:style>
+          <a:lnRef idx="1">
+            <a:schemeClr val="accent1"/>
+          </a:lnRef>
+          <a:fillRef idx="3">
+            <a:schemeClr val="accent1"/>
+          </a:fillRef>
+          <a:effectRef idx="2">
+            <a:schemeClr val="accent1"/>
+          </a:effectRef>
+          <a:fontRef idx="minor">
+            <a:schemeClr val="lt1"/>
+          </a:fontRef>
+        </p:style>
+        <p:txBody>
+          <a:bodyPr rtlCol="0" anchor="ctr"/>
+          <a:lstStyle/>
+          <a:p>
+            <a:pPr algn="ctr"/>
+          </a:p>
+        </p:txBody>
+      </p:sp>
+      <p:sp>
+        <p:nvSpPr>
+          <p:cNvPr id="6" name="Rectangle 5"/>
+          <p:cNvSpPr/>
+          <p:nvPr/>
+        </p:nvSpPr>
+        <p:spPr>
+          <a:xfrm>
+            <a:off x="628650" y="6467475"/>
+            <a:ext cx="10934700" cy="9525"/>
+          </a:xfrm>
+          <a:prstGeom prst="rect">
+            <a:avLst/>
+          </a:prstGeom>
+          <a:solidFill>
+            <a:srgbClr val="2B2317"/>
+          </a:solidFill>
+          <a:ln>
+            <a:noFill/>
+          </a:ln>
+          <a:effectLst/>
+        </p:spPr>
+        <p:style>
+          <a:lnRef idx="1">
+            <a:schemeClr val="accent1"/>
+          </a:lnRef>
+          <a:fillRef idx="3">
+            <a:schemeClr val="accent1"/>
+          </a:fillRef>
+          <a:effectRef idx="2">
+            <a:schemeClr val="accent1"/>
+          </a:effectRef>
+          <a:fontRef idx="minor">
+            <a:schemeClr val="lt1"/>
+          </a:fontRef>
+        </p:style>
+        <p:txBody>
+          <a:bodyPr rtlCol="0" anchor="ctr"/>
+          <a:lstStyle/>
+          <a:p>
+            <a:pPr algn="ctr"/>
+          </a:p>
+        </p:txBody>
+      </p:sp>
+      <p:sp>
+        <p:nvSpPr>
+          <p:cNvPr id="7" name="TextBox 6"/>
           <p:cNvSpPr txBox="1"/>
           <p:nvPr/>
         </p:nvSpPr>
         <p:spPr>
           <a:xfrm>
-            <a:off x="666750" y="3777258"/>
-            <a:ext cx="6326981" cy="1075134"/>
+            <a:off x="590550" y="381000"/>
+            <a:ext cx="2009775" cy="209550"/>
           </a:xfrm>
           <a:prstGeom prst="rect">
             <a:avLst/>
@@ -5909,11 +5873,53 @@
           <a:p>
             <a:pPr algn="l">
               <a:lnSpc>
-                <a:spcPts val="3933"/>
+                <a:spcPts val="825"/>
               </a:lnSpc>
             </a:pPr>
             <a:r>
-              <a:rPr sz="3450" b="0" i="0">
+              <a:rPr sz="819" b="0" i="0" spc="297">
+                <a:solidFill>
+                  <a:srgbClr val="C9A96A"/>
+                </a:solidFill>
+                <a:latin typeface="Inter"/>
+                <a:latin typeface="Inter"/>
+                <a:ea typeface="Inter"/>
+                <a:cs typeface="Inter"/>
+              </a:rPr>
+              <a:t>ПОДБОРКА ЦЕЛИКОМ</a:t>
+            </a:r>
+          </a:p>
+        </p:txBody>
+      </p:sp>
+      <p:sp>
+        <p:nvSpPr>
+          <p:cNvPr id="8" name="TextBox 7"/>
+          <p:cNvSpPr txBox="1"/>
+          <p:nvPr/>
+        </p:nvSpPr>
+        <p:spPr>
+          <a:xfrm>
+            <a:off x="590550" y="571500"/>
+            <a:ext cx="2067669" cy="590550"/>
+          </a:xfrm>
+          <a:prstGeom prst="rect">
+            <a:avLst/>
+          </a:prstGeom>
+          <a:noFill/>
+        </p:spPr>
+        <p:txBody>
+          <a:bodyPr wrap="square" lIns="0" rIns="0" tIns="0" bIns="0" anchor="t">
+            <a:noAutofit/>
+          </a:bodyPr>
+          <a:lstStyle/>
+          <a:p>
+            <a:pPr algn="l">
+              <a:lnSpc>
+                <a:spcPts val="3300"/>
+              </a:lnSpc>
+            </a:pPr>
+            <a:r>
+              <a:rPr sz="3300" b="0" i="0">
                 <a:solidFill>
                   <a:srgbClr val="F5F1E8"/>
                 </a:solidFill>
@@ -5922,21 +5928,21 @@
                 <a:ea typeface="Cormorant Garamond"/>
                 <a:cs typeface="Cormorant Garamond"/>
               </a:rPr>
-              <a:t>Криштиану Роналду. Четыре бутсы — одна карьера.</a:t>
-            </a:r>
-          </a:p>
-        </p:txBody>
-      </p:sp>
-      <p:sp>
-        <p:nvSpPr>
-          <p:cNvPr id="6" name="TextBox 5"/>
+              <a:t>4 предмета</a:t>
+            </a:r>
+          </a:p>
+        </p:txBody>
+      </p:sp>
+      <p:sp>
+        <p:nvSpPr>
+          <p:cNvPr id="9" name="TextBox 8"/>
           <p:cNvSpPr txBox="1"/>
           <p:nvPr/>
         </p:nvSpPr>
         <p:spPr>
           <a:xfrm>
-            <a:off x="647700" y="6334125"/>
-            <a:ext cx="1184672" cy="209550"/>
+            <a:off x="590550" y="1381125"/>
+            <a:ext cx="7077521" cy="257175"/>
           </a:xfrm>
           <a:prstGeom prst="rect">
             <a:avLst/>
@@ -5951,20 +5957,314 @@
           <a:p>
             <a:pPr algn="l">
               <a:lnSpc>
-                <a:spcPts val="1440"/>
+                <a:spcPts val="1519"/>
               </a:lnSpc>
             </a:pPr>
             <a:r>
-              <a:rPr sz="819" b="0" i="0" spc="198">
-                <a:solidFill>
-                  <a:srgbClr val="C9A96A"/>
+              <a:rPr sz="1120" b="0" i="0">
+                <a:solidFill>
+                  <a:srgbClr val="D5CFC3"/>
                 </a:solidFill>
                 <a:latin typeface="Inter"/>
                 <a:latin typeface="Inter"/>
                 <a:ea typeface="Inter"/>
                 <a:cs typeface="Inter"/>
               </a:rPr>
-              <a:t>STARGIFT.RU</a:t>
+              <a:t>Криштиану Роналду — бутса Nike Mercurial CR7 с автографом, подпись при представителе Beckett</a:t>
+            </a:r>
+          </a:p>
+        </p:txBody>
+      </p:sp>
+      <p:sp>
+        <p:nvSpPr>
+          <p:cNvPr id="10" name="TextBox 9"/>
+          <p:cNvSpPr txBox="1"/>
+          <p:nvPr/>
+        </p:nvSpPr>
+        <p:spPr>
+          <a:xfrm>
+            <a:off x="10782449" y="1343025"/>
+            <a:ext cx="971401" cy="314325"/>
+          </a:xfrm>
+          <a:prstGeom prst="rect">
+            <a:avLst/>
+          </a:prstGeom>
+          <a:noFill/>
+        </p:spPr>
+        <p:txBody>
+          <a:bodyPr wrap="square" lIns="0" rIns="0" tIns="0" bIns="0" anchor="t">
+            <a:noAutofit/>
+          </a:bodyPr>
+          <a:lstStyle/>
+          <a:p>
+            <a:pPr algn="l">
+              <a:lnSpc>
+                <a:spcPts val="1889"/>
+              </a:lnSpc>
+            </a:pPr>
+            <a:r>
+              <a:rPr sz="1580" b="0" i="0">
+                <a:solidFill>
+                  <a:srgbClr val="C9A96A"/>
+                </a:solidFill>
+                <a:latin typeface="Cormorant Garamond"/>
+                <a:latin typeface="Cormorant Garamond"/>
+                <a:ea typeface="Cormorant Garamond"/>
+                <a:cs typeface="Cormorant Garamond"/>
+              </a:rPr>
+              <a:t>590 000 ₽</a:t>
+            </a:r>
+          </a:p>
+        </p:txBody>
+      </p:sp>
+      <p:sp>
+        <p:nvSpPr>
+          <p:cNvPr id="11" name="TextBox 10"/>
+          <p:cNvSpPr txBox="1"/>
+          <p:nvPr/>
+        </p:nvSpPr>
+        <p:spPr>
+          <a:xfrm>
+            <a:off x="590550" y="2971800"/>
+            <a:ext cx="5152281" cy="257175"/>
+          </a:xfrm>
+          <a:prstGeom prst="rect">
+            <a:avLst/>
+          </a:prstGeom>
+          <a:noFill/>
+        </p:spPr>
+        <p:txBody>
+          <a:bodyPr wrap="square" lIns="0" rIns="0" tIns="0" bIns="0" anchor="t">
+            <a:noAutofit/>
+          </a:bodyPr>
+          <a:lstStyle/>
+          <a:p>
+            <a:pPr algn="l">
+              <a:lnSpc>
+                <a:spcPts val="1519"/>
+              </a:lnSpc>
+            </a:pPr>
+            <a:r>
+              <a:rPr sz="1120" b="0" i="0">
+                <a:solidFill>
+                  <a:srgbClr val="D5CFC3"/>
+                </a:solidFill>
+                <a:latin typeface="Inter"/>
+                <a:latin typeface="Inter"/>
+                <a:ea typeface="Inter"/>
+                <a:cs typeface="Inter"/>
+              </a:rPr>
+              <a:t>Криштиану Роналду — бутса Nike Mercurial Dream Speed с автографом</a:t>
+            </a:r>
+          </a:p>
+        </p:txBody>
+      </p:sp>
+      <p:sp>
+        <p:nvSpPr>
+          <p:cNvPr id="12" name="TextBox 11"/>
+          <p:cNvSpPr txBox="1"/>
+          <p:nvPr/>
+        </p:nvSpPr>
+        <p:spPr>
+          <a:xfrm>
+            <a:off x="10795099" y="2933700"/>
+            <a:ext cx="958751" cy="314325"/>
+          </a:xfrm>
+          <a:prstGeom prst="rect">
+            <a:avLst/>
+          </a:prstGeom>
+          <a:noFill/>
+        </p:spPr>
+        <p:txBody>
+          <a:bodyPr wrap="square" lIns="0" rIns="0" tIns="0" bIns="0" anchor="t">
+            <a:noAutofit/>
+          </a:bodyPr>
+          <a:lstStyle/>
+          <a:p>
+            <a:pPr algn="l">
+              <a:lnSpc>
+                <a:spcPts val="1889"/>
+              </a:lnSpc>
+            </a:pPr>
+            <a:r>
+              <a:rPr sz="1580" b="0" i="0">
+                <a:solidFill>
+                  <a:srgbClr val="C9A96A"/>
+                </a:solidFill>
+                <a:latin typeface="Cormorant Garamond"/>
+                <a:latin typeface="Cormorant Garamond"/>
+                <a:ea typeface="Cormorant Garamond"/>
+                <a:cs typeface="Cormorant Garamond"/>
+              </a:rPr>
+              <a:t>520 000 ₽</a:t>
+            </a:r>
+          </a:p>
+        </p:txBody>
+      </p:sp>
+      <p:sp>
+        <p:nvSpPr>
+          <p:cNvPr id="13" name="TextBox 12"/>
+          <p:cNvSpPr txBox="1"/>
+          <p:nvPr/>
+        </p:nvSpPr>
+        <p:spPr>
+          <a:xfrm>
+            <a:off x="590550" y="4562475"/>
+            <a:ext cx="5427762" cy="257175"/>
+          </a:xfrm>
+          <a:prstGeom prst="rect">
+            <a:avLst/>
+          </a:prstGeom>
+          <a:noFill/>
+        </p:spPr>
+        <p:txBody>
+          <a:bodyPr wrap="square" lIns="0" rIns="0" tIns="0" bIns="0" anchor="t">
+            <a:noAutofit/>
+          </a:bodyPr>
+          <a:lstStyle/>
+          <a:p>
+            <a:pPr algn="l">
+              <a:lnSpc>
+                <a:spcPts val="1519"/>
+              </a:lnSpc>
+            </a:pPr>
+            <a:r>
+              <a:rPr sz="1120" b="0" i="0">
+                <a:solidFill>
+                  <a:srgbClr val="D5CFC3"/>
+                </a:solidFill>
+                <a:latin typeface="Inter"/>
+                <a:latin typeface="Inter"/>
+                <a:ea typeface="Inter"/>
+                <a:cs typeface="Inter"/>
+              </a:rPr>
+              <a:t>Криштиану Роналду — бутса Nike Mercurial с автографом (Лиссабон, 2018)</a:t>
+            </a:r>
+          </a:p>
+        </p:txBody>
+      </p:sp>
+      <p:sp>
+        <p:nvSpPr>
+          <p:cNvPr id="14" name="TextBox 13"/>
+          <p:cNvSpPr txBox="1"/>
+          <p:nvPr/>
+        </p:nvSpPr>
+        <p:spPr>
+          <a:xfrm>
+            <a:off x="10795099" y="4524375"/>
+            <a:ext cx="958751" cy="314325"/>
+          </a:xfrm>
+          <a:prstGeom prst="rect">
+            <a:avLst/>
+          </a:prstGeom>
+          <a:noFill/>
+        </p:spPr>
+        <p:txBody>
+          <a:bodyPr wrap="square" lIns="0" rIns="0" tIns="0" bIns="0" anchor="t">
+            <a:noAutofit/>
+          </a:bodyPr>
+          <a:lstStyle/>
+          <a:p>
+            <a:pPr algn="l">
+              <a:lnSpc>
+                <a:spcPts val="1889"/>
+              </a:lnSpc>
+            </a:pPr>
+            <a:r>
+              <a:rPr sz="1580" b="0" i="0">
+                <a:solidFill>
+                  <a:srgbClr val="C9A96A"/>
+                </a:solidFill>
+                <a:latin typeface="Cormorant Garamond"/>
+                <a:latin typeface="Cormorant Garamond"/>
+                <a:ea typeface="Cormorant Garamond"/>
+                <a:cs typeface="Cormorant Garamond"/>
+              </a:rPr>
+              <a:t>520 000 ₽</a:t>
+            </a:r>
+          </a:p>
+        </p:txBody>
+      </p:sp>
+      <p:sp>
+        <p:nvSpPr>
+          <p:cNvPr id="15" name="TextBox 14"/>
+          <p:cNvSpPr txBox="1"/>
+          <p:nvPr/>
+        </p:nvSpPr>
+        <p:spPr>
+          <a:xfrm>
+            <a:off x="590550" y="6153150"/>
+            <a:ext cx="5028456" cy="257175"/>
+          </a:xfrm>
+          <a:prstGeom prst="rect">
+            <a:avLst/>
+          </a:prstGeom>
+          <a:noFill/>
+        </p:spPr>
+        <p:txBody>
+          <a:bodyPr wrap="square" lIns="0" rIns="0" tIns="0" bIns="0" anchor="t">
+            <a:noAutofit/>
+          </a:bodyPr>
+          <a:lstStyle/>
+          <a:p>
+            <a:pPr algn="l">
+              <a:lnSpc>
+                <a:spcPts val="1519"/>
+              </a:lnSpc>
+            </a:pPr>
+            <a:r>
+              <a:rPr sz="1120" b="0" i="0">
+                <a:solidFill>
+                  <a:srgbClr val="D5CFC3"/>
+                </a:solidFill>
+                <a:latin typeface="Inter"/>
+                <a:latin typeface="Inter"/>
+                <a:ea typeface="Inter"/>
+                <a:cs typeface="Inter"/>
+              </a:rPr>
+              <a:t>Криштиану Роналду — бутса Nike Mercurial Victory CR7 с автографом</a:t>
+            </a:r>
+          </a:p>
+        </p:txBody>
+      </p:sp>
+      <p:sp>
+        <p:nvSpPr>
+          <p:cNvPr id="16" name="TextBox 15"/>
+          <p:cNvSpPr txBox="1"/>
+          <p:nvPr/>
+        </p:nvSpPr>
+        <p:spPr>
+          <a:xfrm>
+            <a:off x="10795099" y="6115050"/>
+            <a:ext cx="958751" cy="314325"/>
+          </a:xfrm>
+          <a:prstGeom prst="rect">
+            <a:avLst/>
+          </a:prstGeom>
+          <a:noFill/>
+        </p:spPr>
+        <p:txBody>
+          <a:bodyPr wrap="square" lIns="0" rIns="0" tIns="0" bIns="0" anchor="t">
+            <a:noAutofit/>
+          </a:bodyPr>
+          <a:lstStyle/>
+          <a:p>
+            <a:pPr algn="l">
+              <a:lnSpc>
+                <a:spcPts val="1889"/>
+              </a:lnSpc>
+            </a:pPr>
+            <a:r>
+              <a:rPr sz="1580" b="0" i="0">
+                <a:solidFill>
+                  <a:srgbClr val="C9A96A"/>
+                </a:solidFill>
+                <a:latin typeface="Cormorant Garamond"/>
+                <a:latin typeface="Cormorant Garamond"/>
+                <a:ea typeface="Cormorant Garamond"/>
+                <a:cs typeface="Cormorant Garamond"/>
+              </a:rPr>
+              <a:t>520 000 ₽</a:t>
             </a:r>
           </a:p>
         </p:txBody>
